--- a/presentation/Crypto_vs_Traditional_Markets.pptx
+++ b/presentation/Crypto_vs_Traditional_Markets.pptx
@@ -4,6 +4,9 @@
   <p:sldMasterIdLst>
     <p:sldMasterId id="2147483648" r:id="rId1"/>
   </p:sldMasterIdLst>
+  <p:notesMasterIdLst>
+    <p:notesMasterId r:id="rId22"/>
+  </p:notesMasterIdLst>
   <p:sldIdLst>
     <p:sldId id="256" r:id="rId2"/>
     <p:sldId id="257" r:id="rId3"/>
@@ -26,10 +29,7 @@
     <p:sldId id="274" r:id="rId20"/>
     <p:sldId id="275" r:id="rId21"/>
   </p:sldIdLst>
-  <p:notesMasterIdLst>
-    <p:notesMasterId r:id="rId22"/>
-  </p:notesMasterIdLst>
-  <p:sldSz cx="9144000" cy="5143500"/>
+  <p:sldSz cx="9144000" cy="5143500" type="screen16x9"/>
   <p:notesSz cx="5143500" cy="9144000"/>
   <p:defaultTextStyle>
     <a:lvl1pPr marL="0" algn="l" defTabSz="914400" rtl="0" eaLnBrk="1" latinLnBrk="0" hangingPunct="1">
@@ -123,6 +123,11 @@
       </a:defRPr>
     </a:lvl9pPr>
   </p:defaultTextStyle>
+  <p:extLst>
+    <p:ext uri="{EFAFB233-063F-42B5-8137-9DF3F51BA10A}">
+      <p15:sldGuideLst xmlns:p15="http://schemas.microsoft.com/office/powerpoint/2012/main"/>
+    </p:ext>
+  </p:extLst>
 </p:presentation>
 </file>
 
@@ -148,234 +153,10 @@
           <a:chExt cx="0" cy="0"/>
         </a:xfrm>
       </p:grpSpPr>
-      <p:sp>
-        <p:nvSpPr>
-          <p:cNvPr id="2" name="Header Placeholder 1"/>
-          <p:cNvSpPr>
-            <a:spLocks noGrp="1"/>
-          </p:cNvSpPr>
-          <p:nvPr>
-            <p:ph type="hdr" sz="quarter"/>
-          </p:nvPr>
-        </p:nvSpPr>
-        <p:spPr>
-          <a:xfrm>
-            <a:off x="0" y="0"/>
-            <a:ext cx="2971800" cy="458788"/>
-          </a:xfrm>
-          <a:prstGeom prst="rect">
-            <a:avLst/>
-          </a:prstGeom>
-        </p:spPr>
-        <p:txBody>
-          <a:bodyPr vert="horz" lIns="91440" tIns="45720" rIns="91440" bIns="45720" rtlCol="0"/>
-          <a:lstStyle>
-            <a:lvl1pPr algn="l">
-              <a:defRPr sz="1200"/>
-            </a:lvl1pPr>
-          </a:lstStyle>
-          <a:p>
-            <a:endParaRPr lang="en-US"/>
-          </a:p>
-        </p:txBody>
-      </p:sp>
-      <p:sp>
-        <p:nvSpPr>
-          <p:cNvPr id="3" name="Date Placeholder 2"/>
-          <p:cNvSpPr>
-            <a:spLocks noGrp="1"/>
-          </p:cNvSpPr>
-          <p:nvPr>
-            <p:ph type="dt" idx="1"/>
-          </p:nvPr>
-        </p:nvSpPr>
-        <p:spPr>
-          <a:xfrm>
-            <a:off x="3884613" y="0"/>
-            <a:ext cx="2971800" cy="458788"/>
-          </a:xfrm>
-          <a:prstGeom prst="rect">
-            <a:avLst/>
-          </a:prstGeom>
-        </p:spPr>
-        <p:txBody>
-          <a:bodyPr vert="horz" lIns="91440" tIns="45720" rIns="91440" bIns="45720" rtlCol="0"/>
-          <a:lstStyle>
-            <a:lvl1pPr algn="r">
-              <a:defRPr sz="1200"/>
-            </a:lvl1pPr>
-          </a:lstStyle>
-          <a:p>
-            <a:fld id="{5282F153-3F37-0F45-9E97-73ACFA13230C}" type="datetimeFigureOut">
-              <a:rPr lang="en-US"/>
-              <a:t>7/23/19</a:t>
-            </a:fld>
-            <a:endParaRPr lang="en-US"/>
-          </a:p>
-        </p:txBody>
-      </p:sp>
-      <p:sp>
-        <p:nvSpPr>
-          <p:cNvPr id="4" name="Slide Image Placeholder 3"/>
-          <p:cNvSpPr>
-            <a:spLocks noGrp="1" noRot="1" noChangeAspect="1"/>
-          </p:cNvSpPr>
-          <p:nvPr>
-            <p:ph type="sldImg" idx="2"/>
-          </p:nvPr>
-        </p:nvSpPr>
-        <p:spPr>
-          <a:xfrm>
-            <a:off x="685800" y="1143000"/>
-            <a:ext cx="5486400" cy="3086100"/>
-          </a:xfrm>
-          <a:prstGeom prst="rect">
-            <a:avLst/>
-          </a:prstGeom>
-          <a:noFill/>
-          <a:ln w="12700">
-            <a:solidFill>
-              <a:prstClr val="black"/>
-            </a:solidFill>
-          </a:ln>
-        </p:spPr>
-        <p:txBody>
-          <a:bodyPr vert="horz" lIns="91440" tIns="45720" rIns="91440" bIns="45720" rtlCol="0" anchor="ctr"/>
-          <a:lstStyle/>
-          <a:p>
-            <a:endParaRPr lang="en-US"/>
-          </a:p>
-        </p:txBody>
-      </p:sp>
-      <p:sp>
-        <p:nvSpPr>
-          <p:cNvPr id="5" name="Notes Placeholder 4"/>
-          <p:cNvSpPr>
-            <a:spLocks noGrp="1"/>
-          </p:cNvSpPr>
-          <p:nvPr>
-            <p:ph type="body" sz="quarter" idx="3"/>
-          </p:nvPr>
-        </p:nvSpPr>
-        <p:spPr>
-          <a:xfrm>
-            <a:off x="685800" y="4400550"/>
-            <a:ext cx="5486400" cy="3600450"/>
-          </a:xfrm>
-          <a:prstGeom prst="rect">
-            <a:avLst/>
-          </a:prstGeom>
-        </p:spPr>
-        <p:txBody>
-          <a:bodyPr vert="horz" lIns="91440" tIns="45720" rIns="91440" bIns="45720" rtlCol="0"/>
-          <a:lstStyle/>
-          <a:p>
-            <a:pPr lvl="0"/>
-            <a:r>
-              <a:rPr lang="en-US"/>
-              <a:t>Click to edit Master text styles</a:t>
-            </a:r>
-          </a:p>
-          <a:p>
-            <a:pPr lvl="1"/>
-            <a:r>
-              <a:rPr lang="en-US"/>
-              <a:t>Second level</a:t>
-            </a:r>
-          </a:p>
-          <a:p>
-            <a:pPr lvl="2"/>
-            <a:r>
-              <a:rPr lang="en-US"/>
-              <a:t>Third level</a:t>
-            </a:r>
-          </a:p>
-          <a:p>
-            <a:pPr lvl="3"/>
-            <a:r>
-              <a:rPr lang="en-US"/>
-              <a:t>Fourth level</a:t>
-            </a:r>
-          </a:p>
-          <a:p>
-            <a:pPr lvl="4"/>
-            <a:r>
-              <a:rPr lang="en-US"/>
-              <a:t>Fifth level</a:t>
-            </a:r>
-          </a:p>
-        </p:txBody>
-      </p:sp>
-      <p:sp>
-        <p:nvSpPr>
-          <p:cNvPr id="6" name="Footer Placeholder 5"/>
-          <p:cNvSpPr>
-            <a:spLocks noGrp="1"/>
-          </p:cNvSpPr>
-          <p:nvPr>
-            <p:ph type="ftr" sz="quarter" idx="4"/>
-          </p:nvPr>
-        </p:nvSpPr>
-        <p:spPr>
-          <a:xfrm>
-            <a:off x="0" y="8685213"/>
-            <a:ext cx="2971800" cy="458787"/>
-          </a:xfrm>
-          <a:prstGeom prst="rect">
-            <a:avLst/>
-          </a:prstGeom>
-        </p:spPr>
-        <p:txBody>
-          <a:bodyPr vert="horz" lIns="91440" tIns="45720" rIns="91440" bIns="45720" rtlCol="0" anchor="b"/>
-          <a:lstStyle>
-            <a:lvl1pPr algn="l">
-              <a:defRPr sz="1200"/>
-            </a:lvl1pPr>
-          </a:lstStyle>
-          <a:p>
-            <a:endParaRPr lang="en-US"/>
-          </a:p>
-        </p:txBody>
-      </p:sp>
-      <p:sp>
-        <p:nvSpPr>
-          <p:cNvPr id="7" name="Slide Number Placeholder 6"/>
-          <p:cNvSpPr>
-            <a:spLocks noGrp="1"/>
-          </p:cNvSpPr>
-          <p:nvPr>
-            <p:ph type="sldNum" sz="quarter" idx="5"/>
-          </p:nvPr>
-        </p:nvSpPr>
-        <p:spPr>
-          <a:xfrm>
-            <a:off x="3884613" y="8685213"/>
-            <a:ext cx="2971800" cy="458787"/>
-          </a:xfrm>
-          <a:prstGeom prst="rect">
-            <a:avLst/>
-          </a:prstGeom>
-        </p:spPr>
-        <p:txBody>
-          <a:bodyPr vert="horz" lIns="91440" tIns="45720" rIns="91440" bIns="45720" rtlCol="0" anchor="b"/>
-          <a:lstStyle>
-            <a:lvl1pPr algn="r">
-              <a:defRPr sz="1200"/>
-            </a:lvl1pPr>
-          </a:lstStyle>
-          <a:p>
-            <a:fld id="{CE5E9CC1-C706-0F49-92D6-E571CC5EEA8F}" type="slidenum">
-              <a:rPr lang="en-US"/>
-              <a:t>‹#›</a:t>
-            </a:fld>
-            <a:endParaRPr lang="en-US"/>
-          </a:p>
-        </p:txBody>
-      </p:sp>
     </p:spTree>
     <p:extLst>
       <p:ext uri="{BB962C8B-B14F-4D97-AF65-F5344CB8AC3E}">
-        <p14:creationId xmlns:p14="http://schemas.microsoft.com/office/powerpoint/2010/main" val="1024086991"/>
+        <p14:creationId xmlns:p14="http://schemas.microsoft.com/office/powerpoint/2010/main" val="3433592043"/>
       </p:ext>
     </p:extLst>
   </p:cSld>
@@ -519,10 +300,6 @@
           <a:bodyPr/>
           <a:lstStyle/>
           <a:p>
-            <a:r>
-              <a:rPr lang="en-US" dirty="0"/>
-              <a:t/>
-            </a:r>
             <a:endParaRPr lang="en-US" dirty="0"/>
           </a:p>
         </p:txBody>
@@ -607,10 +384,6 @@
           <a:bodyPr/>
           <a:lstStyle/>
           <a:p>
-            <a:r>
-              <a:rPr lang="en-US" dirty="0"/>
-              <a:t/>
-            </a:r>
             <a:endParaRPr lang="en-US" dirty="0"/>
           </a:p>
         </p:txBody>
@@ -695,10 +468,6 @@
           <a:bodyPr/>
           <a:lstStyle/>
           <a:p>
-            <a:r>
-              <a:rPr lang="en-US" dirty="0"/>
-              <a:t/>
-            </a:r>
             <a:endParaRPr lang="en-US" dirty="0"/>
           </a:p>
         </p:txBody>
@@ -783,10 +552,6 @@
           <a:bodyPr/>
           <a:lstStyle/>
           <a:p>
-            <a:r>
-              <a:rPr lang="en-US" dirty="0"/>
-              <a:t/>
-            </a:r>
             <a:endParaRPr lang="en-US" dirty="0"/>
           </a:p>
         </p:txBody>
@@ -871,10 +636,6 @@
           <a:bodyPr/>
           <a:lstStyle/>
           <a:p>
-            <a:r>
-              <a:rPr lang="en-US" dirty="0"/>
-              <a:t/>
-            </a:r>
             <a:endParaRPr lang="en-US" dirty="0"/>
           </a:p>
         </p:txBody>
@@ -959,10 +720,6 @@
           <a:bodyPr/>
           <a:lstStyle/>
           <a:p>
-            <a:r>
-              <a:rPr lang="en-US" dirty="0"/>
-              <a:t/>
-            </a:r>
             <a:endParaRPr lang="en-US" dirty="0"/>
           </a:p>
         </p:txBody>
@@ -1047,10 +804,6 @@
           <a:bodyPr/>
           <a:lstStyle/>
           <a:p>
-            <a:r>
-              <a:rPr lang="en-US" dirty="0"/>
-              <a:t/>
-            </a:r>
             <a:endParaRPr lang="en-US" dirty="0"/>
           </a:p>
         </p:txBody>
@@ -1135,10 +888,6 @@
           <a:bodyPr/>
           <a:lstStyle/>
           <a:p>
-            <a:r>
-              <a:rPr lang="en-US" dirty="0"/>
-              <a:t/>
-            </a:r>
             <a:endParaRPr lang="en-US" dirty="0"/>
           </a:p>
         </p:txBody>
@@ -1223,10 +972,6 @@
           <a:bodyPr/>
           <a:lstStyle/>
           <a:p>
-            <a:r>
-              <a:rPr lang="en-US" dirty="0"/>
-              <a:t/>
-            </a:r>
             <a:endParaRPr lang="en-US" dirty="0"/>
           </a:p>
         </p:txBody>
@@ -1311,10 +1056,6 @@
           <a:bodyPr/>
           <a:lstStyle/>
           <a:p>
-            <a:r>
-              <a:rPr lang="en-US" dirty="0"/>
-              <a:t/>
-            </a:r>
             <a:endParaRPr lang="en-US" dirty="0"/>
           </a:p>
         </p:txBody>
@@ -1399,10 +1140,6 @@
           <a:bodyPr/>
           <a:lstStyle/>
           <a:p>
-            <a:r>
-              <a:rPr lang="en-US" dirty="0"/>
-              <a:t/>
-            </a:r>
             <a:endParaRPr lang="en-US" dirty="0"/>
           </a:p>
         </p:txBody>
@@ -1487,10 +1224,6 @@
           <a:bodyPr/>
           <a:lstStyle/>
           <a:p>
-            <a:r>
-              <a:rPr lang="en-US" dirty="0"/>
-              <a:t/>
-            </a:r>
             <a:endParaRPr lang="en-US" dirty="0"/>
           </a:p>
         </p:txBody>
@@ -1575,10 +1308,6 @@
           <a:bodyPr/>
           <a:lstStyle/>
           <a:p>
-            <a:r>
-              <a:rPr lang="en-US" dirty="0"/>
-              <a:t/>
-            </a:r>
             <a:endParaRPr lang="en-US" dirty="0"/>
           </a:p>
         </p:txBody>
@@ -1663,10 +1392,6 @@
           <a:bodyPr/>
           <a:lstStyle/>
           <a:p>
-            <a:r>
-              <a:rPr lang="en-US" dirty="0"/>
-              <a:t/>
-            </a:r>
             <a:endParaRPr lang="en-US" dirty="0"/>
           </a:p>
         </p:txBody>
@@ -1751,10 +1476,6 @@
           <a:bodyPr/>
           <a:lstStyle/>
           <a:p>
-            <a:r>
-              <a:rPr lang="en-US" dirty="0"/>
-              <a:t/>
-            </a:r>
             <a:endParaRPr lang="en-US" dirty="0"/>
           </a:p>
         </p:txBody>
@@ -1839,10 +1560,6 @@
           <a:bodyPr/>
           <a:lstStyle/>
           <a:p>
-            <a:r>
-              <a:rPr lang="en-US" dirty="0"/>
-              <a:t/>
-            </a:r>
             <a:endParaRPr lang="en-US" dirty="0"/>
           </a:p>
         </p:txBody>
@@ -1927,10 +1644,6 @@
           <a:bodyPr/>
           <a:lstStyle/>
           <a:p>
-            <a:r>
-              <a:rPr lang="en-US" dirty="0"/>
-              <a:t/>
-            </a:r>
             <a:endParaRPr lang="en-US" dirty="0"/>
           </a:p>
         </p:txBody>
@@ -2015,10 +1728,6 @@
           <a:bodyPr/>
           <a:lstStyle/>
           <a:p>
-            <a:r>
-              <a:rPr lang="en-US" dirty="0"/>
-              <a:t/>
-            </a:r>
             <a:endParaRPr lang="en-US" dirty="0"/>
           </a:p>
         </p:txBody>
@@ -2103,10 +1812,6 @@
           <a:bodyPr/>
           <a:lstStyle/>
           <a:p>
-            <a:r>
-              <a:rPr lang="en-US" dirty="0"/>
-              <a:t/>
-            </a:r>
             <a:endParaRPr lang="en-US" dirty="0"/>
           </a:p>
         </p:txBody>
@@ -2191,10 +1896,6 @@
           <a:bodyPr/>
           <a:lstStyle/>
           <a:p>
-            <a:r>
-              <a:rPr lang="en-US" dirty="0"/>
-              <a:t/>
-            </a:r>
             <a:endParaRPr lang="en-US" dirty="0"/>
           </a:p>
         </p:txBody>
@@ -2268,6 +1969,11 @@
 <file path=ppt/slideMasters/slideMaster1.xml><?xml version="1.0" encoding="utf-8"?>
 <p:sldMaster xmlns:a="http://schemas.openxmlformats.org/drawingml/2006/main" xmlns:r="http://schemas.openxmlformats.org/officeDocument/2006/relationships" xmlns:p="http://schemas.openxmlformats.org/presentationml/2006/main">
   <p:cSld>
+    <p:bg>
+      <p:bgRef idx="1001">
+        <a:schemeClr val="bg1"/>
+      </p:bgRef>
+    </p:bg>
     <p:spTree>
       <p:nvGrpSpPr>
         <p:cNvPr id="1" name=""/>
@@ -2550,6 +2256,7 @@
         <a:solidFill>
           <a:srgbClr val="1C2B4A"/>
         </a:solidFill>
+        <a:effectLst/>
       </p:bgPr>
     </p:bg>
     <p:spTree>
@@ -2590,6 +2297,13 @@
             <a:prstDash val="solid"/>
           </a:ln>
         </p:spPr>
+        <p:txBody>
+          <a:bodyPr/>
+          <a:lstStyle/>
+          <a:p>
+            <a:endParaRPr lang="en-US"/>
+          </a:p>
+        </p:txBody>
       </p:sp>
       <p:sp>
         <p:nvSpPr>
@@ -2612,7 +2326,7 @@
           <a:bodyPr wrap="square" rtlCol="0" anchor="ctr"/>
           <a:lstStyle/>
           <a:p>
-            <a:pPr algn="ctr" indent="0" marL="0">
+            <a:pPr marL="0" indent="0" algn="ctr">
               <a:buNone/>
             </a:pPr>
             <a:r>
@@ -2651,6 +2365,13 @@
             <a:prstDash val="solid"/>
           </a:ln>
         </p:spPr>
+        <p:txBody>
+          <a:bodyPr/>
+          <a:lstStyle/>
+          <a:p>
+            <a:endParaRPr lang="en-US"/>
+          </a:p>
+        </p:txBody>
       </p:sp>
       <p:sp>
         <p:nvSpPr>
@@ -2673,7 +2394,7 @@
           <a:bodyPr wrap="square" rtlCol="0" anchor="ctr"/>
           <a:lstStyle/>
           <a:p>
-            <a:pPr algn="ctr" indent="0" marL="0">
+            <a:pPr marL="0" indent="0" algn="ctr">
               <a:buNone/>
             </a:pPr>
             <a:r>
@@ -2709,7 +2430,7 @@
           <a:bodyPr wrap="square" lIns="0" tIns="0" rIns="0" bIns="0" rtlCol="0" anchor="ctr"/>
           <a:lstStyle/>
           <a:p>
-            <a:pPr algn="l" indent="0" marL="0">
+            <a:pPr marL="0" indent="0" algn="l">
               <a:buNone/>
             </a:pPr>
             <a:r>
@@ -2748,7 +2469,7 @@
           <a:bodyPr wrap="square" lIns="0" tIns="0" rIns="0" bIns="0" rtlCol="0" anchor="ctr"/>
           <a:lstStyle/>
           <a:p>
-            <a:pPr algn="l" indent="0" marL="0">
+            <a:pPr marL="0" indent="0" algn="l">
               <a:buNone/>
             </a:pPr>
             <a:r>
@@ -2790,6 +2511,13 @@
             <a:prstDash val="solid"/>
           </a:ln>
         </p:spPr>
+        <p:txBody>
+          <a:bodyPr/>
+          <a:lstStyle/>
+          <a:p>
+            <a:endParaRPr lang="en-US"/>
+          </a:p>
+        </p:txBody>
       </p:sp>
       <p:sp>
         <p:nvSpPr>
@@ -2812,7 +2540,7 @@
           <a:bodyPr wrap="square" lIns="0" tIns="0" rIns="0" bIns="0" rtlCol="0" anchor="ctr"/>
           <a:lstStyle/>
           <a:p>
-            <a:pPr indent="0" marL="0">
+            <a:pPr marL="0" indent="0">
               <a:buNone/>
             </a:pPr>
             <a:r>
@@ -2826,9 +2554,6 @@
               </a:rPr>
               <a:t>Data: </a:t>
             </a:r>
-            <a:pPr indent="0" marL="0">
-              <a:buNone/>
-            </a:pPr>
             <a:r>
               <a:rPr lang="en-US" sz="1300" dirty="0">
                 <a:solidFill>
@@ -2865,7 +2590,7 @@
           <a:bodyPr wrap="square" lIns="0" tIns="0" rIns="0" bIns="0" rtlCol="0" anchor="ctr"/>
           <a:lstStyle/>
           <a:p>
-            <a:pPr indent="0" marL="0">
+            <a:pPr marL="0" indent="0">
               <a:buNone/>
             </a:pPr>
             <a:r>
@@ -2899,6 +2624,7 @@
         <a:solidFill>
           <a:srgbClr val="FFFFFF"/>
         </a:solidFill>
+        <a:effectLst/>
       </p:bgPr>
     </p:bg>
     <p:spTree>
@@ -2936,7 +2662,7 @@
           <a:bodyPr wrap="square" lIns="0" tIns="0" rIns="0" bIns="0" rtlCol="0" anchor="ctr"/>
           <a:lstStyle/>
           <a:p>
-            <a:pPr indent="0" marL="0">
+            <a:pPr marL="0" indent="0">
               <a:buNone/>
             </a:pPr>
             <a:r>
@@ -2978,17 +2704,24 @@
             <a:prstDash val="solid"/>
           </a:ln>
         </p:spPr>
+        <p:txBody>
+          <a:bodyPr/>
+          <a:lstStyle/>
+          <a:p>
+            <a:endParaRPr lang="en-US"/>
+          </a:p>
+        </p:txBody>
       </p:sp>
       <p:pic>
         <p:nvPicPr>
-          <p:cNvPr id="4" name="Image 0" descr="/sessions/vibrant-quirky-carson/mnt/Crypto-vs-Traditional-Markets/fig5_scatter_regression.png">    </p:cNvPr>
+          <p:cNvPr id="4" name="Image 0" descr="/sessions/vibrant-quirky-carson/mnt/Crypto-vs-Traditional-Markets/fig5_scatter_regression.png"/>
           <p:cNvPicPr>
             <a:picLocks noChangeAspect="1"/>
           </p:cNvPicPr>
           <p:nvPr/>
         </p:nvPicPr>
         <p:blipFill>
-          <a:blip r:embed="rId1"/>
+          <a:blip r:embed="rId3"/>
           <a:stretch>
             <a:fillRect/>
           </a:stretch>
@@ -3027,13 +2760,20 @@
             <a:prstDash val="solid"/>
           </a:ln>
           <a:effectLst>
-            <a:outerShdw sx="100000" sy="100000" kx="0" ky="0" algn="bl" rotWithShape="0" blurRad="101600" dist="38100" dir="8100000">
+            <a:outerShdw blurRad="101600" dist="38100" dir="8100000" algn="bl" rotWithShape="0">
               <a:srgbClr val="000000">
                 <a:alpha val="10000"/>
               </a:srgbClr>
             </a:outerShdw>
           </a:effectLst>
         </p:spPr>
+        <p:txBody>
+          <a:bodyPr/>
+          <a:lstStyle/>
+          <a:p>
+            <a:endParaRPr lang="en-US"/>
+          </a:p>
+        </p:txBody>
       </p:sp>
       <p:sp>
         <p:nvSpPr>
@@ -3056,7 +2796,7 @@
           <a:bodyPr wrap="square" lIns="0" tIns="0" rIns="0" bIns="0" rtlCol="0" anchor="ctr"/>
           <a:lstStyle/>
           <a:p>
-            <a:pPr indent="0" marL="0">
+            <a:pPr marL="0" indent="0">
               <a:buNone/>
             </a:pPr>
             <a:r>
@@ -3098,6 +2838,13 @@
             <a:prstDash val="solid"/>
           </a:ln>
         </p:spPr>
+        <p:txBody>
+          <a:bodyPr/>
+          <a:lstStyle/>
+          <a:p>
+            <a:endParaRPr lang="en-US"/>
+          </a:p>
+        </p:txBody>
       </p:sp>
       <p:sp>
         <p:nvSpPr>
@@ -3120,7 +2867,7 @@
           <a:bodyPr wrap="square" lIns="0" tIns="0" rIns="0" bIns="0" rtlCol="0" anchor="ctr"/>
           <a:lstStyle/>
           <a:p>
-            <a:pPr indent="0" marL="0">
+            <a:pPr marL="0" indent="0">
               <a:buNone/>
             </a:pPr>
             <a:r>
@@ -3159,7 +2906,7 @@
           <a:bodyPr wrap="square" lIns="0" tIns="0" rIns="0" bIns="0" rtlCol="0" anchor="ctr"/>
           <a:lstStyle/>
           <a:p>
-            <a:pPr algn="r" indent="0" marL="0">
+            <a:pPr marL="0" indent="0" algn="r">
               <a:buNone/>
             </a:pPr>
             <a:r>
@@ -3201,6 +2948,13 @@
             <a:prstDash val="solid"/>
           </a:ln>
         </p:spPr>
+        <p:txBody>
+          <a:bodyPr/>
+          <a:lstStyle/>
+          <a:p>
+            <a:endParaRPr lang="en-US"/>
+          </a:p>
+        </p:txBody>
       </p:sp>
       <p:sp>
         <p:nvSpPr>
@@ -3223,7 +2977,7 @@
           <a:bodyPr wrap="square" lIns="0" tIns="0" rIns="0" bIns="0" rtlCol="0" anchor="ctr"/>
           <a:lstStyle/>
           <a:p>
-            <a:pPr indent="0" marL="0">
+            <a:pPr marL="0" indent="0">
               <a:buNone/>
             </a:pPr>
             <a:r>
@@ -3262,7 +3016,7 @@
           <a:bodyPr wrap="square" lIns="0" tIns="0" rIns="0" bIns="0" rtlCol="0" anchor="ctr"/>
           <a:lstStyle/>
           <a:p>
-            <a:pPr algn="r" indent="0" marL="0">
+            <a:pPr marL="0" indent="0" algn="r">
               <a:buNone/>
             </a:pPr>
             <a:r>
@@ -3304,6 +3058,13 @@
             <a:prstDash val="solid"/>
           </a:ln>
         </p:spPr>
+        <p:txBody>
+          <a:bodyPr/>
+          <a:lstStyle/>
+          <a:p>
+            <a:endParaRPr lang="en-US"/>
+          </a:p>
+        </p:txBody>
       </p:sp>
       <p:sp>
         <p:nvSpPr>
@@ -3326,7 +3087,7 @@
           <a:bodyPr wrap="square" lIns="0" tIns="0" rIns="0" bIns="0" rtlCol="0" anchor="ctr"/>
           <a:lstStyle/>
           <a:p>
-            <a:pPr indent="0" marL="0">
+            <a:pPr marL="0" indent="0">
               <a:buNone/>
             </a:pPr>
             <a:r>
@@ -3365,7 +3126,7 @@
           <a:bodyPr wrap="square" lIns="0" tIns="0" rIns="0" bIns="0" rtlCol="0" anchor="ctr"/>
           <a:lstStyle/>
           <a:p>
-            <a:pPr algn="r" indent="0" marL="0">
+            <a:pPr marL="0" indent="0" algn="r">
               <a:buNone/>
             </a:pPr>
             <a:r>
@@ -3407,6 +3168,13 @@
             <a:prstDash val="solid"/>
           </a:ln>
         </p:spPr>
+        <p:txBody>
+          <a:bodyPr/>
+          <a:lstStyle/>
+          <a:p>
+            <a:endParaRPr lang="en-US"/>
+          </a:p>
+        </p:txBody>
       </p:sp>
       <p:sp>
         <p:nvSpPr>
@@ -3429,7 +3197,7 @@
           <a:bodyPr wrap="square" lIns="0" tIns="0" rIns="0" bIns="0" rtlCol="0" anchor="ctr"/>
           <a:lstStyle/>
           <a:p>
-            <a:pPr indent="0" marL="0">
+            <a:pPr marL="0" indent="0">
               <a:buNone/>
             </a:pPr>
             <a:r>
@@ -3468,7 +3236,7 @@
           <a:bodyPr wrap="square" lIns="0" tIns="0" rIns="0" bIns="0" rtlCol="0" anchor="ctr"/>
           <a:lstStyle/>
           <a:p>
-            <a:pPr algn="r" indent="0" marL="0">
+            <a:pPr marL="0" indent="0" algn="r">
               <a:buNone/>
             </a:pPr>
             <a:r>
@@ -3507,7 +3275,7 @@
           <a:bodyPr wrap="square" lIns="0" tIns="0" rIns="0" bIns="0" rtlCol="0" anchor="ctr"/>
           <a:lstStyle/>
           <a:p>
-            <a:pPr indent="0" marL="0">
+            <a:pPr marL="0" indent="0">
               <a:buNone/>
             </a:pPr>
             <a:r>
@@ -3546,7 +3314,7 @@
           <a:bodyPr wrap="square" lIns="0" tIns="0" rIns="0" bIns="0" rtlCol="0" anchor="ctr"/>
           <a:lstStyle/>
           <a:p>
-            <a:pPr indent="0" marL="0">
+            <a:pPr marL="0" indent="0">
               <a:buNone/>
             </a:pPr>
             <a:r>
@@ -3580,6 +3348,7 @@
         <a:solidFill>
           <a:srgbClr val="1C2B4A"/>
         </a:solidFill>
+        <a:effectLst/>
       </p:bgPr>
     </p:bg>
     <p:spTree>
@@ -3617,7 +3386,7 @@
           <a:bodyPr wrap="square" lIns="0" tIns="0" rIns="0" bIns="0" rtlCol="0" anchor="ctr"/>
           <a:lstStyle/>
           <a:p>
-            <a:pPr indent="0" marL="0">
+            <a:pPr marL="0" indent="0">
               <a:buNone/>
             </a:pPr>
             <a:r>
@@ -3656,7 +3425,7 @@
           <a:bodyPr wrap="square" lIns="0" tIns="0" rIns="0" bIns="0" rtlCol="0" anchor="ctr"/>
           <a:lstStyle/>
           <a:p>
-            <a:pPr indent="0" marL="0">
+            <a:pPr marL="0" indent="0">
               <a:buNone/>
             </a:pPr>
             <a:r>
@@ -3698,6 +3467,13 @@
             <a:prstDash val="solid"/>
           </a:ln>
         </p:spPr>
+        <p:txBody>
+          <a:bodyPr/>
+          <a:lstStyle/>
+          <a:p>
+            <a:endParaRPr lang="en-US"/>
+          </a:p>
+        </p:txBody>
       </p:sp>
       <p:sp>
         <p:nvSpPr>
@@ -3723,13 +3499,20 @@
             <a:prstDash val="solid"/>
           </a:ln>
           <a:effectLst>
-            <a:outerShdw sx="100000" sy="100000" kx="0" ky="0" algn="bl" rotWithShape="0" blurRad="101600" dist="38100" dir="8100000">
+            <a:outerShdw blurRad="101600" dist="38100" dir="8100000" algn="bl" rotWithShape="0">
               <a:srgbClr val="000000">
                 <a:alpha val="10000"/>
               </a:srgbClr>
             </a:outerShdw>
           </a:effectLst>
         </p:spPr>
+        <p:txBody>
+          <a:bodyPr/>
+          <a:lstStyle/>
+          <a:p>
+            <a:endParaRPr lang="en-US"/>
+          </a:p>
+        </p:txBody>
       </p:sp>
       <p:sp>
         <p:nvSpPr>
@@ -3755,6 +3538,13 @@
             <a:prstDash val="solid"/>
           </a:ln>
         </p:spPr>
+        <p:txBody>
+          <a:bodyPr/>
+          <a:lstStyle/>
+          <a:p>
+            <a:endParaRPr lang="en-US"/>
+          </a:p>
+        </p:txBody>
       </p:sp>
       <p:sp>
         <p:nvSpPr>
@@ -3777,7 +3567,7 @@
           <a:bodyPr wrap="square" lIns="0" tIns="0" rIns="0" bIns="0" rtlCol="0" anchor="ctr"/>
           <a:lstStyle/>
           <a:p>
-            <a:pPr indent="0" marL="0">
+            <a:pPr marL="0" indent="0">
               <a:buNone/>
             </a:pPr>
             <a:r>
@@ -3816,7 +3606,7 @@
           <a:bodyPr wrap="square" lIns="0" tIns="0" rIns="0" bIns="0" rtlCol="0" anchor="ctr"/>
           <a:lstStyle/>
           <a:p>
-            <a:pPr indent="0" marL="0">
+            <a:pPr marL="0" indent="0">
               <a:buNone/>
             </a:pPr>
             <a:r>
@@ -3855,7 +3645,7 @@
           <a:bodyPr wrap="square" lIns="0" tIns="0" rIns="0" bIns="0" rtlCol="0" anchor="ctr"/>
           <a:lstStyle/>
           <a:p>
-            <a:pPr indent="0" marL="0">
+            <a:pPr marL="0" indent="0">
               <a:buNone/>
             </a:pPr>
             <a:r>
@@ -3894,7 +3684,7 @@
           <a:bodyPr wrap="square" lIns="0" tIns="0" rIns="0" bIns="0" rtlCol="0" anchor="ctr"/>
           <a:lstStyle/>
           <a:p>
-            <a:pPr indent="0" marL="0">
+            <a:pPr marL="0" indent="0">
               <a:buNone/>
             </a:pPr>
             <a:r>
@@ -3933,7 +3723,7 @@
           <a:bodyPr wrap="square" lIns="0" tIns="0" rIns="0" bIns="0" rtlCol="0" anchor="ctr"/>
           <a:lstStyle/>
           <a:p>
-            <a:pPr indent="0" marL="0">
+            <a:pPr marL="0" indent="0">
               <a:buNone/>
             </a:pPr>
             <a:r>
@@ -3972,7 +3762,7 @@
           <a:bodyPr wrap="square" lIns="0" tIns="0" rIns="0" bIns="0" rtlCol="0" anchor="ctr"/>
           <a:lstStyle/>
           <a:p>
-            <a:pPr indent="0" marL="0">
+            <a:pPr marL="0" indent="0">
               <a:buNone/>
             </a:pPr>
             <a:r>
@@ -4011,7 +3801,7 @@
           <a:bodyPr wrap="square" lIns="0" tIns="0" rIns="0" bIns="0" rtlCol="0" anchor="ctr"/>
           <a:lstStyle/>
           <a:p>
-            <a:pPr indent="0" marL="0">
+            <a:pPr marL="0" indent="0">
               <a:buNone/>
             </a:pPr>
             <a:r>
@@ -4053,6 +3843,13 @@
             <a:prstDash val="solid"/>
           </a:ln>
         </p:spPr>
+        <p:txBody>
+          <a:bodyPr/>
+          <a:lstStyle/>
+          <a:p>
+            <a:endParaRPr lang="en-US"/>
+          </a:p>
+        </p:txBody>
       </p:sp>
       <p:sp>
         <p:nvSpPr>
@@ -4075,7 +3872,7 @@
           <a:bodyPr wrap="square" lIns="0" tIns="0" rIns="0" bIns="0" rtlCol="0" anchor="ctr"/>
           <a:lstStyle/>
           <a:p>
-            <a:pPr algn="ctr" indent="0" marL="0">
+            <a:pPr marL="0" indent="0" algn="ctr">
               <a:buNone/>
             </a:pPr>
             <a:r>
@@ -4117,13 +3914,20 @@
             <a:prstDash val="solid"/>
           </a:ln>
           <a:effectLst>
-            <a:outerShdw sx="100000" sy="100000" kx="0" ky="0" algn="bl" rotWithShape="0" blurRad="101600" dist="38100" dir="8100000">
+            <a:outerShdw blurRad="101600" dist="38100" dir="8100000" algn="bl" rotWithShape="0">
               <a:srgbClr val="000000">
                 <a:alpha val="10000"/>
               </a:srgbClr>
             </a:outerShdw>
           </a:effectLst>
         </p:spPr>
+        <p:txBody>
+          <a:bodyPr/>
+          <a:lstStyle/>
+          <a:p>
+            <a:endParaRPr lang="en-US"/>
+          </a:p>
+        </p:txBody>
       </p:sp>
       <p:sp>
         <p:nvSpPr>
@@ -4149,6 +3953,13 @@
             <a:prstDash val="solid"/>
           </a:ln>
         </p:spPr>
+        <p:txBody>
+          <a:bodyPr/>
+          <a:lstStyle/>
+          <a:p>
+            <a:endParaRPr lang="en-US"/>
+          </a:p>
+        </p:txBody>
       </p:sp>
       <p:sp>
         <p:nvSpPr>
@@ -4171,7 +3982,7 @@
           <a:bodyPr wrap="square" lIns="0" tIns="0" rIns="0" bIns="0" rtlCol="0" anchor="ctr"/>
           <a:lstStyle/>
           <a:p>
-            <a:pPr indent="0" marL="0">
+            <a:pPr marL="0" indent="0">
               <a:buNone/>
             </a:pPr>
             <a:r>
@@ -4210,7 +4021,7 @@
           <a:bodyPr wrap="square" lIns="0" tIns="0" rIns="0" bIns="0" rtlCol="0" anchor="ctr"/>
           <a:lstStyle/>
           <a:p>
-            <a:pPr indent="0" marL="0">
+            <a:pPr marL="0" indent="0">
               <a:buNone/>
             </a:pPr>
             <a:r>
@@ -4249,7 +4060,7 @@
           <a:bodyPr wrap="square" lIns="0" tIns="0" rIns="0" bIns="0" rtlCol="0" anchor="ctr"/>
           <a:lstStyle/>
           <a:p>
-            <a:pPr indent="0" marL="0">
+            <a:pPr marL="0" indent="0">
               <a:buNone/>
             </a:pPr>
             <a:r>
@@ -4288,7 +4099,7 @@
           <a:bodyPr wrap="square" lIns="0" tIns="0" rIns="0" bIns="0" rtlCol="0" anchor="ctr"/>
           <a:lstStyle/>
           <a:p>
-            <a:pPr indent="0" marL="0">
+            <a:pPr marL="0" indent="0">
               <a:buNone/>
             </a:pPr>
             <a:r>
@@ -4327,7 +4138,7 @@
           <a:bodyPr wrap="square" lIns="0" tIns="0" rIns="0" bIns="0" rtlCol="0" anchor="ctr"/>
           <a:lstStyle/>
           <a:p>
-            <a:pPr indent="0" marL="0">
+            <a:pPr marL="0" indent="0">
               <a:buNone/>
             </a:pPr>
             <a:r>
@@ -4366,7 +4177,7 @@
           <a:bodyPr wrap="square" lIns="0" tIns="0" rIns="0" bIns="0" rtlCol="0" anchor="ctr"/>
           <a:lstStyle/>
           <a:p>
-            <a:pPr indent="0" marL="0">
+            <a:pPr marL="0" indent="0">
               <a:buNone/>
             </a:pPr>
             <a:r>
@@ -4405,7 +4216,7 @@
           <a:bodyPr wrap="square" lIns="0" tIns="0" rIns="0" bIns="0" rtlCol="0" anchor="ctr"/>
           <a:lstStyle/>
           <a:p>
-            <a:pPr indent="0" marL="0">
+            <a:pPr marL="0" indent="0">
               <a:buNone/>
             </a:pPr>
             <a:r>
@@ -4447,6 +4258,13 @@
             <a:prstDash val="solid"/>
           </a:ln>
         </p:spPr>
+        <p:txBody>
+          <a:bodyPr/>
+          <a:lstStyle/>
+          <a:p>
+            <a:endParaRPr lang="en-US"/>
+          </a:p>
+        </p:txBody>
       </p:sp>
       <p:sp>
         <p:nvSpPr>
@@ -4469,7 +4287,7 @@
           <a:bodyPr wrap="square" lIns="0" tIns="0" rIns="0" bIns="0" rtlCol="0" anchor="ctr"/>
           <a:lstStyle/>
           <a:p>
-            <a:pPr algn="ctr" indent="0" marL="0">
+            <a:pPr marL="0" indent="0" algn="ctr">
               <a:buNone/>
             </a:pPr>
             <a:r>
@@ -4511,13 +4329,20 @@
             <a:prstDash val="solid"/>
           </a:ln>
           <a:effectLst>
-            <a:outerShdw sx="100000" sy="100000" kx="0" ky="0" algn="bl" rotWithShape="0" blurRad="101600" dist="38100" dir="8100000">
+            <a:outerShdw blurRad="101600" dist="38100" dir="8100000" algn="bl" rotWithShape="0">
               <a:srgbClr val="000000">
                 <a:alpha val="10000"/>
               </a:srgbClr>
             </a:outerShdw>
           </a:effectLst>
         </p:spPr>
+        <p:txBody>
+          <a:bodyPr/>
+          <a:lstStyle/>
+          <a:p>
+            <a:endParaRPr lang="en-US"/>
+          </a:p>
+        </p:txBody>
       </p:sp>
       <p:sp>
         <p:nvSpPr>
@@ -4543,6 +4368,13 @@
             <a:prstDash val="solid"/>
           </a:ln>
         </p:spPr>
+        <p:txBody>
+          <a:bodyPr/>
+          <a:lstStyle/>
+          <a:p>
+            <a:endParaRPr lang="en-US"/>
+          </a:p>
+        </p:txBody>
       </p:sp>
       <p:sp>
         <p:nvSpPr>
@@ -4565,7 +4397,7 @@
           <a:bodyPr wrap="square" lIns="0" tIns="0" rIns="0" bIns="0" rtlCol="0" anchor="ctr"/>
           <a:lstStyle/>
           <a:p>
-            <a:pPr indent="0" marL="0">
+            <a:pPr marL="0" indent="0">
               <a:buNone/>
             </a:pPr>
             <a:r>
@@ -4604,7 +4436,7 @@
           <a:bodyPr wrap="square" lIns="0" tIns="0" rIns="0" bIns="0" rtlCol="0" anchor="ctr"/>
           <a:lstStyle/>
           <a:p>
-            <a:pPr indent="0" marL="0">
+            <a:pPr marL="0" indent="0">
               <a:buNone/>
             </a:pPr>
             <a:r>
@@ -4643,7 +4475,7 @@
           <a:bodyPr wrap="square" lIns="0" tIns="0" rIns="0" bIns="0" rtlCol="0" anchor="ctr"/>
           <a:lstStyle/>
           <a:p>
-            <a:pPr indent="0" marL="0">
+            <a:pPr marL="0" indent="0">
               <a:buNone/>
             </a:pPr>
             <a:r>
@@ -4682,7 +4514,7 @@
           <a:bodyPr wrap="square" lIns="0" tIns="0" rIns="0" bIns="0" rtlCol="0" anchor="ctr"/>
           <a:lstStyle/>
           <a:p>
-            <a:pPr indent="0" marL="0">
+            <a:pPr marL="0" indent="0">
               <a:buNone/>
             </a:pPr>
             <a:r>
@@ -4721,7 +4553,7 @@
           <a:bodyPr wrap="square" lIns="0" tIns="0" rIns="0" bIns="0" rtlCol="0" anchor="ctr"/>
           <a:lstStyle/>
           <a:p>
-            <a:pPr indent="0" marL="0">
+            <a:pPr marL="0" indent="0">
               <a:buNone/>
             </a:pPr>
             <a:r>
@@ -4760,7 +4592,7 @@
           <a:bodyPr wrap="square" lIns="0" tIns="0" rIns="0" bIns="0" rtlCol="0" anchor="ctr"/>
           <a:lstStyle/>
           <a:p>
-            <a:pPr indent="0" marL="0">
+            <a:pPr marL="0" indent="0">
               <a:buNone/>
             </a:pPr>
             <a:r>
@@ -4799,7 +4631,7 @@
           <a:bodyPr wrap="square" lIns="0" tIns="0" rIns="0" bIns="0" rtlCol="0" anchor="ctr"/>
           <a:lstStyle/>
           <a:p>
-            <a:pPr indent="0" marL="0">
+            <a:pPr marL="0" indent="0">
               <a:buNone/>
             </a:pPr>
             <a:r>
@@ -4841,6 +4673,13 @@
             <a:prstDash val="solid"/>
           </a:ln>
         </p:spPr>
+        <p:txBody>
+          <a:bodyPr/>
+          <a:lstStyle/>
+          <a:p>
+            <a:endParaRPr lang="en-US"/>
+          </a:p>
+        </p:txBody>
       </p:sp>
       <p:sp>
         <p:nvSpPr>
@@ -4863,7 +4702,7 @@
           <a:bodyPr wrap="square" lIns="0" tIns="0" rIns="0" bIns="0" rtlCol="0" anchor="ctr"/>
           <a:lstStyle/>
           <a:p>
-            <a:pPr algn="ctr" indent="0" marL="0">
+            <a:pPr marL="0" indent="0" algn="ctr">
               <a:buNone/>
             </a:pPr>
             <a:r>
@@ -4905,6 +4744,13 @@
             <a:prstDash val="solid"/>
           </a:ln>
         </p:spPr>
+        <p:txBody>
+          <a:bodyPr/>
+          <a:lstStyle/>
+          <a:p>
+            <a:endParaRPr lang="en-US"/>
+          </a:p>
+        </p:txBody>
       </p:sp>
       <p:sp>
         <p:nvSpPr>
@@ -4927,7 +4773,7 @@
           <a:bodyPr wrap="square" lIns="0" tIns="0" rIns="0" bIns="0" rtlCol="0" anchor="ctr"/>
           <a:lstStyle/>
           <a:p>
-            <a:pPr algn="ctr" indent="0" marL="0">
+            <a:pPr marL="0" indent="0" algn="ctr">
               <a:buNone/>
             </a:pPr>
             <a:r>
@@ -4961,6 +4807,7 @@
         <a:solidFill>
           <a:srgbClr val="FFFFFF"/>
         </a:solidFill>
+        <a:effectLst/>
       </p:bgPr>
     </p:bg>
     <p:spTree>
@@ -4998,7 +4845,7 @@
           <a:bodyPr wrap="square" lIns="0" tIns="0" rIns="0" bIns="0" rtlCol="0" anchor="ctr"/>
           <a:lstStyle/>
           <a:p>
-            <a:pPr indent="0" marL="0">
+            <a:pPr marL="0" indent="0">
               <a:buNone/>
             </a:pPr>
             <a:r>
@@ -5040,24 +4887,31 @@
             <a:prstDash val="solid"/>
           </a:ln>
         </p:spPr>
+        <p:txBody>
+          <a:bodyPr/>
+          <a:lstStyle/>
+          <a:p>
+            <a:endParaRPr lang="en-US"/>
+          </a:p>
+        </p:txBody>
       </p:sp>
       <p:pic>
         <p:nvPicPr>
-          <p:cNvPr id="4" name="Image 0" descr="/sessions/vibrant-quirky-carson/mnt/Crypto-vs-Traditional-Markets/fig8_drawdown.png">    </p:cNvPr>
+          <p:cNvPr id="4" name="Image 0" descr="/sessions/vibrant-quirky-carson/mnt/Crypto-vs-Traditional-Markets/fig8_drawdown.png"/>
           <p:cNvPicPr>
             <a:picLocks noChangeAspect="1"/>
           </p:cNvPicPr>
           <p:nvPr/>
         </p:nvPicPr>
         <p:blipFill>
-          <a:blip r:embed="rId1"/>
+          <a:blip r:embed="rId3"/>
           <a:stretch>
             <a:fillRect/>
           </a:stretch>
         </p:blipFill>
         <p:spPr>
           <a:xfrm>
-            <a:off x="274320" y="804672"/>
+            <a:off x="182880" y="749808"/>
             <a:ext cx="8595360" cy="4160520"/>
           </a:xfrm>
           <a:prstGeom prst="rect">
@@ -5086,7 +4940,7 @@
           <a:bodyPr wrap="square" lIns="0" tIns="0" rIns="0" bIns="0" rtlCol="0" anchor="ctr"/>
           <a:lstStyle/>
           <a:p>
-            <a:pPr indent="0" marL="0">
+            <a:pPr marL="0" indent="0">
               <a:buNone/>
             </a:pPr>
             <a:r>
@@ -5120,6 +4974,7 @@
         <a:solidFill>
           <a:srgbClr val="1C2B4A"/>
         </a:solidFill>
+        <a:effectLst/>
       </p:bgPr>
     </p:bg>
     <p:spTree>
@@ -5157,7 +5012,7 @@
           <a:bodyPr wrap="square" lIns="0" tIns="0" rIns="0" bIns="0" rtlCol="0" anchor="ctr"/>
           <a:lstStyle/>
           <a:p>
-            <a:pPr indent="0" marL="0">
+            <a:pPr marL="0" indent="0">
               <a:buNone/>
             </a:pPr>
             <a:r>
@@ -5196,7 +5051,7 @@
           <a:bodyPr wrap="square" lIns="0" tIns="0" rIns="0" bIns="0" rtlCol="0" anchor="ctr"/>
           <a:lstStyle/>
           <a:p>
-            <a:pPr indent="0" marL="0">
+            <a:pPr marL="0" indent="0">
               <a:buNone/>
             </a:pPr>
             <a:r>
@@ -5238,6 +5093,13 @@
             <a:prstDash val="solid"/>
           </a:ln>
         </p:spPr>
+        <p:txBody>
+          <a:bodyPr/>
+          <a:lstStyle/>
+          <a:p>
+            <a:endParaRPr lang="en-US"/>
+          </a:p>
+        </p:txBody>
       </p:sp>
       <p:sp>
         <p:nvSpPr>
@@ -5263,13 +5125,20 @@
             <a:prstDash val="solid"/>
           </a:ln>
           <a:effectLst>
-            <a:outerShdw sx="100000" sy="100000" kx="0" ky="0" algn="bl" rotWithShape="0" blurRad="101600" dist="38100" dir="8100000">
+            <a:outerShdw blurRad="101600" dist="38100" dir="8100000" algn="bl" rotWithShape="0">
               <a:srgbClr val="000000">
                 <a:alpha val="10000"/>
               </a:srgbClr>
             </a:outerShdw>
           </a:effectLst>
         </p:spPr>
+        <p:txBody>
+          <a:bodyPr/>
+          <a:lstStyle/>
+          <a:p>
+            <a:endParaRPr lang="en-US"/>
+          </a:p>
+        </p:txBody>
       </p:sp>
       <p:sp>
         <p:nvSpPr>
@@ -5295,6 +5164,13 @@
             <a:prstDash val="solid"/>
           </a:ln>
         </p:spPr>
+        <p:txBody>
+          <a:bodyPr/>
+          <a:lstStyle/>
+          <a:p>
+            <a:endParaRPr lang="en-US"/>
+          </a:p>
+        </p:txBody>
       </p:sp>
       <p:sp>
         <p:nvSpPr>
@@ -5317,7 +5193,7 @@
           <a:bodyPr wrap="square" lIns="0" tIns="0" rIns="0" bIns="0" rtlCol="0" anchor="ctr"/>
           <a:lstStyle/>
           <a:p>
-            <a:pPr indent="0" marL="0">
+            <a:pPr marL="0" indent="0">
               <a:buNone/>
             </a:pPr>
             <a:r>
@@ -5356,7 +5232,7 @@
           <a:bodyPr wrap="square" lIns="0" tIns="0" rIns="0" bIns="0" rtlCol="0" anchor="ctr"/>
           <a:lstStyle/>
           <a:p>
-            <a:pPr indent="0" marL="0">
+            <a:pPr marL="0" indent="0">
               <a:buNone/>
             </a:pPr>
             <a:r>
@@ -5395,7 +5271,7 @@
           <a:bodyPr wrap="square" lIns="0" tIns="0" rIns="0" bIns="0" rtlCol="0" anchor="ctr"/>
           <a:lstStyle/>
           <a:p>
-            <a:pPr indent="0" marL="0">
+            <a:pPr marL="0" indent="0">
               <a:buNone/>
             </a:pPr>
             <a:r>
@@ -5437,13 +5313,20 @@
             <a:prstDash val="solid"/>
           </a:ln>
           <a:effectLst>
-            <a:outerShdw sx="100000" sy="100000" kx="0" ky="0" algn="bl" rotWithShape="0" blurRad="101600" dist="38100" dir="8100000">
+            <a:outerShdw blurRad="101600" dist="38100" dir="8100000" algn="bl" rotWithShape="0">
               <a:srgbClr val="000000">
                 <a:alpha val="10000"/>
               </a:srgbClr>
             </a:outerShdw>
           </a:effectLst>
         </p:spPr>
+        <p:txBody>
+          <a:bodyPr/>
+          <a:lstStyle/>
+          <a:p>
+            <a:endParaRPr lang="en-US"/>
+          </a:p>
+        </p:txBody>
       </p:sp>
       <p:sp>
         <p:nvSpPr>
@@ -5469,6 +5352,13 @@
             <a:prstDash val="solid"/>
           </a:ln>
         </p:spPr>
+        <p:txBody>
+          <a:bodyPr/>
+          <a:lstStyle/>
+          <a:p>
+            <a:endParaRPr lang="en-US"/>
+          </a:p>
+        </p:txBody>
       </p:sp>
       <p:sp>
         <p:nvSpPr>
@@ -5491,7 +5381,7 @@
           <a:bodyPr wrap="square" lIns="0" tIns="0" rIns="0" bIns="0" rtlCol="0" anchor="ctr"/>
           <a:lstStyle/>
           <a:p>
-            <a:pPr indent="0" marL="0">
+            <a:pPr marL="0" indent="0">
               <a:buNone/>
             </a:pPr>
             <a:r>
@@ -5530,7 +5420,7 @@
           <a:bodyPr wrap="square" lIns="0" tIns="0" rIns="0" bIns="0" rtlCol="0" anchor="ctr"/>
           <a:lstStyle/>
           <a:p>
-            <a:pPr indent="0" marL="0">
+            <a:pPr marL="0" indent="0">
               <a:buNone/>
             </a:pPr>
             <a:r>
@@ -5569,7 +5459,7 @@
           <a:bodyPr wrap="square" lIns="0" tIns="0" rIns="0" bIns="0" rtlCol="0" anchor="ctr"/>
           <a:lstStyle/>
           <a:p>
-            <a:pPr indent="0" marL="0">
+            <a:pPr marL="0" indent="0">
               <a:buNone/>
             </a:pPr>
             <a:r>
@@ -5611,13 +5501,20 @@
             <a:prstDash val="solid"/>
           </a:ln>
           <a:effectLst>
-            <a:outerShdw sx="100000" sy="100000" kx="0" ky="0" algn="bl" rotWithShape="0" blurRad="101600" dist="38100" dir="8100000">
+            <a:outerShdw blurRad="101600" dist="38100" dir="8100000" algn="bl" rotWithShape="0">
               <a:srgbClr val="000000">
                 <a:alpha val="10000"/>
               </a:srgbClr>
             </a:outerShdw>
           </a:effectLst>
         </p:spPr>
+        <p:txBody>
+          <a:bodyPr/>
+          <a:lstStyle/>
+          <a:p>
+            <a:endParaRPr lang="en-US"/>
+          </a:p>
+        </p:txBody>
       </p:sp>
       <p:sp>
         <p:nvSpPr>
@@ -5643,6 +5540,13 @@
             <a:prstDash val="solid"/>
           </a:ln>
         </p:spPr>
+        <p:txBody>
+          <a:bodyPr/>
+          <a:lstStyle/>
+          <a:p>
+            <a:endParaRPr lang="en-US"/>
+          </a:p>
+        </p:txBody>
       </p:sp>
       <p:sp>
         <p:nvSpPr>
@@ -5665,7 +5569,7 @@
           <a:bodyPr wrap="square" lIns="0" tIns="0" rIns="0" bIns="0" rtlCol="0" anchor="ctr"/>
           <a:lstStyle/>
           <a:p>
-            <a:pPr indent="0" marL="0">
+            <a:pPr marL="0" indent="0">
               <a:buNone/>
             </a:pPr>
             <a:r>
@@ -5704,7 +5608,7 @@
           <a:bodyPr wrap="square" lIns="0" tIns="0" rIns="0" bIns="0" rtlCol="0" anchor="ctr"/>
           <a:lstStyle/>
           <a:p>
-            <a:pPr indent="0" marL="0">
+            <a:pPr marL="0" indent="0">
               <a:buNone/>
             </a:pPr>
             <a:r>
@@ -5743,7 +5647,7 @@
           <a:bodyPr wrap="square" lIns="0" tIns="0" rIns="0" bIns="0" rtlCol="0" anchor="ctr"/>
           <a:lstStyle/>
           <a:p>
-            <a:pPr indent="0" marL="0">
+            <a:pPr marL="0" indent="0">
               <a:buNone/>
             </a:pPr>
             <a:r>
@@ -5785,13 +5689,20 @@
             <a:prstDash val="solid"/>
           </a:ln>
           <a:effectLst>
-            <a:outerShdw sx="100000" sy="100000" kx="0" ky="0" algn="bl" rotWithShape="0" blurRad="101600" dist="38100" dir="8100000">
+            <a:outerShdw blurRad="101600" dist="38100" dir="8100000" algn="bl" rotWithShape="0">
               <a:srgbClr val="000000">
                 <a:alpha val="10000"/>
               </a:srgbClr>
             </a:outerShdw>
           </a:effectLst>
         </p:spPr>
+        <p:txBody>
+          <a:bodyPr/>
+          <a:lstStyle/>
+          <a:p>
+            <a:endParaRPr lang="en-US"/>
+          </a:p>
+        </p:txBody>
       </p:sp>
       <p:sp>
         <p:nvSpPr>
@@ -5817,6 +5728,13 @@
             <a:prstDash val="solid"/>
           </a:ln>
         </p:spPr>
+        <p:txBody>
+          <a:bodyPr/>
+          <a:lstStyle/>
+          <a:p>
+            <a:endParaRPr lang="en-US"/>
+          </a:p>
+        </p:txBody>
       </p:sp>
       <p:sp>
         <p:nvSpPr>
@@ -5839,7 +5757,7 @@
           <a:bodyPr wrap="square" lIns="0" tIns="0" rIns="0" bIns="0" rtlCol="0" anchor="ctr"/>
           <a:lstStyle/>
           <a:p>
-            <a:pPr indent="0" marL="0">
+            <a:pPr marL="0" indent="0">
               <a:buNone/>
             </a:pPr>
             <a:r>
@@ -5878,7 +5796,7 @@
           <a:bodyPr wrap="square" lIns="0" tIns="0" rIns="0" bIns="0" rtlCol="0" anchor="ctr"/>
           <a:lstStyle/>
           <a:p>
-            <a:pPr indent="0" marL="0">
+            <a:pPr marL="0" indent="0">
               <a:buNone/>
             </a:pPr>
             <a:r>
@@ -5917,7 +5835,7 @@
           <a:bodyPr wrap="square" lIns="0" tIns="0" rIns="0" bIns="0" rtlCol="0" anchor="ctr"/>
           <a:lstStyle/>
           <a:p>
-            <a:pPr indent="0" marL="0">
+            <a:pPr marL="0" indent="0">
               <a:buNone/>
             </a:pPr>
             <a:r>
@@ -5959,13 +5877,20 @@
             <a:prstDash val="solid"/>
           </a:ln>
           <a:effectLst>
-            <a:outerShdw sx="100000" sy="100000" kx="0" ky="0" algn="bl" rotWithShape="0" blurRad="101600" dist="38100" dir="8100000">
+            <a:outerShdw blurRad="101600" dist="38100" dir="8100000" algn="bl" rotWithShape="0">
               <a:srgbClr val="000000">
                 <a:alpha val="10000"/>
               </a:srgbClr>
             </a:outerShdw>
           </a:effectLst>
         </p:spPr>
+        <p:txBody>
+          <a:bodyPr/>
+          <a:lstStyle/>
+          <a:p>
+            <a:endParaRPr lang="en-US"/>
+          </a:p>
+        </p:txBody>
       </p:sp>
       <p:sp>
         <p:nvSpPr>
@@ -5988,7 +5913,7 @@
           <a:bodyPr wrap="square" lIns="0" tIns="0" rIns="0" bIns="0" rtlCol="0" anchor="ctr"/>
           <a:lstStyle/>
           <a:p>
-            <a:pPr indent="0" marL="0">
+            <a:pPr marL="0" indent="0">
               <a:buNone/>
             </a:pPr>
             <a:r>
@@ -6027,7 +5952,7 @@
           <a:bodyPr wrap="square" lIns="0" tIns="0" rIns="0" bIns="0" rtlCol="0" anchor="ctr"/>
           <a:lstStyle/>
           <a:p>
-            <a:pPr indent="0" marL="0">
+            <a:pPr marL="0" indent="0">
               <a:buNone/>
             </a:pPr>
             <a:r>
@@ -6066,7 +5991,7 @@
           <a:bodyPr wrap="square" lIns="0" tIns="0" rIns="0" bIns="0" rtlCol="0" anchor="ctr"/>
           <a:lstStyle/>
           <a:p>
-            <a:pPr indent="0" marL="0">
+            <a:pPr marL="0" indent="0">
               <a:buNone/>
             </a:pPr>
             <a:r>
@@ -6105,7 +6030,7 @@
           <a:bodyPr wrap="square" lIns="0" tIns="0" rIns="0" bIns="0" rtlCol="0" anchor="ctr"/>
           <a:lstStyle/>
           <a:p>
-            <a:pPr indent="0" marL="0">
+            <a:pPr marL="0" indent="0">
               <a:buNone/>
             </a:pPr>
             <a:r>
@@ -6144,7 +6069,7 @@
           <a:bodyPr wrap="square" lIns="0" tIns="0" rIns="0" bIns="0" rtlCol="0" anchor="ctr"/>
           <a:lstStyle/>
           <a:p>
-            <a:pPr indent="0" marL="0">
+            <a:pPr marL="0" indent="0">
               <a:buNone/>
             </a:pPr>
             <a:r>
@@ -6183,7 +6108,7 @@
           <a:bodyPr wrap="square" lIns="0" tIns="0" rIns="0" bIns="0" rtlCol="0" anchor="ctr"/>
           <a:lstStyle/>
           <a:p>
-            <a:pPr indent="0" marL="0">
+            <a:pPr marL="0" indent="0">
               <a:buNone/>
             </a:pPr>
             <a:r>
@@ -6222,7 +6147,7 @@
           <a:bodyPr wrap="square" lIns="0" tIns="0" rIns="0" bIns="0" rtlCol="0" anchor="ctr"/>
           <a:lstStyle/>
           <a:p>
-            <a:pPr indent="0" marL="0">
+            <a:pPr marL="0" indent="0">
               <a:buNone/>
             </a:pPr>
             <a:r>
@@ -6261,7 +6186,7 @@
           <a:bodyPr wrap="square" lIns="0" tIns="0" rIns="0" bIns="0" rtlCol="0" anchor="ctr"/>
           <a:lstStyle/>
           <a:p>
-            <a:pPr indent="0" marL="0">
+            <a:pPr marL="0" indent="0">
               <a:buNone/>
             </a:pPr>
             <a:r>
@@ -6300,7 +6225,7 @@
           <a:bodyPr wrap="square" lIns="0" tIns="0" rIns="0" bIns="0" rtlCol="0" anchor="ctr"/>
           <a:lstStyle/>
           <a:p>
-            <a:pPr indent="0" marL="0">
+            <a:pPr marL="0" indent="0">
               <a:buNone/>
             </a:pPr>
             <a:r>
@@ -6339,7 +6264,7 @@
           <a:bodyPr wrap="square" lIns="0" tIns="0" rIns="0" bIns="0" rtlCol="0" anchor="ctr"/>
           <a:lstStyle/>
           <a:p>
-            <a:pPr indent="0" marL="0">
+            <a:pPr marL="0" indent="0">
               <a:buNone/>
             </a:pPr>
             <a:r>
@@ -6378,7 +6303,7 @@
           <a:bodyPr wrap="square" lIns="0" tIns="0" rIns="0" bIns="0" rtlCol="0" anchor="ctr"/>
           <a:lstStyle/>
           <a:p>
-            <a:pPr indent="0" marL="0">
+            <a:pPr marL="0" indent="0">
               <a:buNone/>
             </a:pPr>
             <a:r>
@@ -6417,7 +6342,7 @@
           <a:bodyPr wrap="square" lIns="0" tIns="0" rIns="0" bIns="0" rtlCol="0" anchor="ctr"/>
           <a:lstStyle/>
           <a:p>
-            <a:pPr indent="0" marL="0">
+            <a:pPr marL="0" indent="0">
               <a:buNone/>
             </a:pPr>
             <a:r>
@@ -6456,7 +6381,7 @@
           <a:bodyPr wrap="square" lIns="0" tIns="0" rIns="0" bIns="0" rtlCol="0" anchor="ctr"/>
           <a:lstStyle/>
           <a:p>
-            <a:pPr indent="0" marL="0">
+            <a:pPr marL="0" indent="0">
               <a:buNone/>
             </a:pPr>
             <a:r>
@@ -6495,7 +6420,7 @@
           <a:bodyPr wrap="square" lIns="0" tIns="0" rIns="0" bIns="0" rtlCol="0" anchor="ctr"/>
           <a:lstStyle/>
           <a:p>
-            <a:pPr indent="0" marL="0">
+            <a:pPr marL="0" indent="0">
               <a:buNone/>
             </a:pPr>
             <a:r>
@@ -6534,7 +6459,7 @@
           <a:bodyPr wrap="square" lIns="0" tIns="0" rIns="0" bIns="0" rtlCol="0" anchor="ctr"/>
           <a:lstStyle/>
           <a:p>
-            <a:pPr indent="0" marL="0">
+            <a:pPr marL="0" indent="0">
               <a:buNone/>
             </a:pPr>
             <a:r>
@@ -6573,7 +6498,7 @@
           <a:bodyPr wrap="square" lIns="0" tIns="0" rIns="0" bIns="0" rtlCol="0" anchor="ctr"/>
           <a:lstStyle/>
           <a:p>
-            <a:pPr indent="0" marL="0">
+            <a:pPr marL="0" indent="0">
               <a:buNone/>
             </a:pPr>
             <a:r>
@@ -6612,7 +6537,7 @@
           <a:bodyPr wrap="square" lIns="0" tIns="0" rIns="0" bIns="0" rtlCol="0" anchor="ctr"/>
           <a:lstStyle/>
           <a:p>
-            <a:pPr indent="0" marL="0">
+            <a:pPr marL="0" indent="0">
               <a:buNone/>
             </a:pPr>
             <a:r>
@@ -6651,7 +6576,7 @@
           <a:bodyPr wrap="square" lIns="0" tIns="0" rIns="0" bIns="0" rtlCol="0" anchor="ctr"/>
           <a:lstStyle/>
           <a:p>
-            <a:pPr indent="0" marL="0">
+            <a:pPr marL="0" indent="0">
               <a:buNone/>
             </a:pPr>
             <a:r>
@@ -6690,7 +6615,7 @@
           <a:bodyPr wrap="square" lIns="0" tIns="0" rIns="0" bIns="0" rtlCol="0" anchor="ctr"/>
           <a:lstStyle/>
           <a:p>
-            <a:pPr indent="0" marL="0">
+            <a:pPr marL="0" indent="0">
               <a:buNone/>
             </a:pPr>
             <a:r>
@@ -6729,7 +6654,7 @@
           <a:bodyPr wrap="square" lIns="0" tIns="0" rIns="0" bIns="0" rtlCol="0" anchor="ctr"/>
           <a:lstStyle/>
           <a:p>
-            <a:pPr indent="0" marL="0">
+            <a:pPr marL="0" indent="0">
               <a:buNone/>
             </a:pPr>
             <a:r>
@@ -6768,7 +6693,7 @@
           <a:bodyPr wrap="square" lIns="0" tIns="0" rIns="0" bIns="0" rtlCol="0" anchor="ctr"/>
           <a:lstStyle/>
           <a:p>
-            <a:pPr indent="0" marL="0">
+            <a:pPr marL="0" indent="0">
               <a:buNone/>
             </a:pPr>
             <a:r>
@@ -6802,6 +6727,7 @@
         <a:solidFill>
           <a:srgbClr val="FFFFFF"/>
         </a:solidFill>
+        <a:effectLst/>
       </p:bgPr>
     </p:bg>
     <p:spTree>
@@ -6826,7 +6752,7 @@
         </p:nvSpPr>
         <p:spPr>
           <a:xfrm>
-            <a:off x="365760" y="182880"/>
+            <a:off x="594360" y="128016"/>
             <a:ext cx="8412480" cy="502920"/>
           </a:xfrm>
           <a:prstGeom prst="rect">
@@ -6839,7 +6765,7 @@
           <a:bodyPr wrap="square" lIns="0" tIns="0" rIns="0" bIns="0" rtlCol="0" anchor="ctr"/>
           <a:lstStyle/>
           <a:p>
-            <a:pPr indent="0" marL="0">
+            <a:pPr marL="0" indent="0">
               <a:buNone/>
             </a:pPr>
             <a:r>
@@ -6881,17 +6807,24 @@
             <a:prstDash val="solid"/>
           </a:ln>
         </p:spPr>
+        <p:txBody>
+          <a:bodyPr/>
+          <a:lstStyle/>
+          <a:p>
+            <a:endParaRPr lang="en-US"/>
+          </a:p>
+        </p:txBody>
       </p:sp>
       <p:pic>
         <p:nvPicPr>
-          <p:cNvPr id="4" name="Image 0" descr="/sessions/vibrant-quirky-carson/mnt/Crypto-vs-Traditional-Markets/fig9_rolling_volatility.png">    </p:cNvPr>
+          <p:cNvPr id="4" name="Image 0" descr="/sessions/vibrant-quirky-carson/mnt/Crypto-vs-Traditional-Markets/fig9_rolling_volatility.png"/>
           <p:cNvPicPr>
             <a:picLocks noChangeAspect="1"/>
           </p:cNvPicPr>
           <p:nvPr/>
         </p:nvPicPr>
         <p:blipFill>
-          <a:blip r:embed="rId1"/>
+          <a:blip r:embed="rId3"/>
           <a:stretch>
             <a:fillRect/>
           </a:stretch>
@@ -6930,13 +6863,20 @@
             <a:prstDash val="solid"/>
           </a:ln>
           <a:effectLst>
-            <a:outerShdw sx="100000" sy="100000" kx="0" ky="0" algn="bl" rotWithShape="0" blurRad="101600" dist="38100" dir="8100000">
+            <a:outerShdw blurRad="101600" dist="38100" dir="8100000" algn="bl" rotWithShape="0">
               <a:srgbClr val="000000">
                 <a:alpha val="10000"/>
               </a:srgbClr>
             </a:outerShdw>
           </a:effectLst>
         </p:spPr>
+        <p:txBody>
+          <a:bodyPr/>
+          <a:lstStyle/>
+          <a:p>
+            <a:endParaRPr lang="en-US"/>
+          </a:p>
+        </p:txBody>
       </p:sp>
       <p:sp>
         <p:nvSpPr>
@@ -6962,6 +6902,13 @@
             <a:prstDash val="solid"/>
           </a:ln>
         </p:spPr>
+        <p:txBody>
+          <a:bodyPr/>
+          <a:lstStyle/>
+          <a:p>
+            <a:endParaRPr lang="en-US"/>
+          </a:p>
+        </p:txBody>
       </p:sp>
       <p:sp>
         <p:nvSpPr>
@@ -6984,7 +6931,7 @@
           <a:bodyPr wrap="square" lIns="0" tIns="0" rIns="0" bIns="0" rtlCol="0" anchor="ctr"/>
           <a:lstStyle/>
           <a:p>
-            <a:pPr indent="0" marL="0">
+            <a:pPr marL="0" indent="0">
               <a:buNone/>
             </a:pPr>
             <a:r>
@@ -7023,7 +6970,7 @@
           <a:bodyPr wrap="square" lIns="0" tIns="0" rIns="0" bIns="0" rtlCol="0" anchor="ctr"/>
           <a:lstStyle/>
           <a:p>
-            <a:pPr indent="0" marL="0">
+            <a:pPr marL="0" indent="0">
               <a:buNone/>
             </a:pPr>
             <a:r>
@@ -7065,13 +7012,20 @@
             <a:prstDash val="solid"/>
           </a:ln>
           <a:effectLst>
-            <a:outerShdw sx="100000" sy="100000" kx="0" ky="0" algn="bl" rotWithShape="0" blurRad="101600" dist="38100" dir="8100000">
+            <a:outerShdw blurRad="101600" dist="38100" dir="8100000" algn="bl" rotWithShape="0">
               <a:srgbClr val="000000">
                 <a:alpha val="10000"/>
               </a:srgbClr>
             </a:outerShdw>
           </a:effectLst>
         </p:spPr>
+        <p:txBody>
+          <a:bodyPr/>
+          <a:lstStyle/>
+          <a:p>
+            <a:endParaRPr lang="en-US"/>
+          </a:p>
+        </p:txBody>
       </p:sp>
       <p:sp>
         <p:nvSpPr>
@@ -7097,6 +7051,13 @@
             <a:prstDash val="solid"/>
           </a:ln>
         </p:spPr>
+        <p:txBody>
+          <a:bodyPr/>
+          <a:lstStyle/>
+          <a:p>
+            <a:endParaRPr lang="en-US"/>
+          </a:p>
+        </p:txBody>
       </p:sp>
       <p:sp>
         <p:nvSpPr>
@@ -7119,7 +7080,7 @@
           <a:bodyPr wrap="square" lIns="0" tIns="0" rIns="0" bIns="0" rtlCol="0" anchor="ctr"/>
           <a:lstStyle/>
           <a:p>
-            <a:pPr indent="0" marL="0">
+            <a:pPr marL="0" indent="0">
               <a:buNone/>
             </a:pPr>
             <a:r>
@@ -7158,7 +7119,7 @@
           <a:bodyPr wrap="square" lIns="0" tIns="0" rIns="0" bIns="0" rtlCol="0" anchor="ctr"/>
           <a:lstStyle/>
           <a:p>
-            <a:pPr indent="0" marL="0">
+            <a:pPr marL="0" indent="0">
               <a:buNone/>
             </a:pPr>
             <a:r>
@@ -7192,6 +7153,7 @@
         <a:solidFill>
           <a:srgbClr val="FFFFFF"/>
         </a:solidFill>
+        <a:effectLst/>
       </p:bgPr>
     </p:bg>
     <p:spTree>
@@ -7229,7 +7191,7 @@
           <a:bodyPr wrap="square" lIns="0" tIns="0" rIns="0" bIns="0" rtlCol="0" anchor="ctr"/>
           <a:lstStyle/>
           <a:p>
-            <a:pPr indent="0" marL="0">
+            <a:pPr marL="0" indent="0">
               <a:buNone/>
             </a:pPr>
             <a:r>
@@ -7271,17 +7233,24 @@
             <a:prstDash val="solid"/>
           </a:ln>
         </p:spPr>
+        <p:txBody>
+          <a:bodyPr/>
+          <a:lstStyle/>
+          <a:p>
+            <a:endParaRPr lang="en-US"/>
+          </a:p>
+        </p:txBody>
       </p:sp>
       <p:pic>
         <p:nvPicPr>
-          <p:cNvPr id="4" name="Image 0" descr="/sessions/vibrant-quirky-carson/mnt/Crypto-vs-Traditional-Markets/fig11_return_distribution.png">    </p:cNvPr>
+          <p:cNvPr id="4" name="Image 0" descr="/sessions/vibrant-quirky-carson/mnt/Crypto-vs-Traditional-Markets/fig11_return_distribution.png"/>
           <p:cNvPicPr>
             <a:picLocks noChangeAspect="1"/>
           </p:cNvPicPr>
           <p:nvPr/>
         </p:nvPicPr>
         <p:blipFill>
-          <a:blip r:embed="rId1"/>
+          <a:blip r:embed="rId3"/>
           <a:stretch>
             <a:fillRect/>
           </a:stretch>
@@ -7317,7 +7286,7 @@
           <a:bodyPr wrap="square" lIns="0" tIns="0" rIns="0" bIns="0" rtlCol="0" anchor="ctr"/>
           <a:lstStyle/>
           <a:p>
-            <a:pPr indent="0" marL="0">
+            <a:pPr marL="0" indent="0">
               <a:buNone/>
             </a:pPr>
             <a:r>
@@ -7351,6 +7320,7 @@
         <a:solidFill>
           <a:srgbClr val="FFFFFF"/>
         </a:solidFill>
+        <a:effectLst/>
       </p:bgPr>
     </p:bg>
     <p:spTree>
@@ -7388,7 +7358,7 @@
           <a:bodyPr wrap="square" lIns="0" tIns="0" rIns="0" bIns="0" rtlCol="0" anchor="ctr"/>
           <a:lstStyle/>
           <a:p>
-            <a:pPr indent="0" marL="0">
+            <a:pPr marL="0" indent="0">
               <a:buNone/>
             </a:pPr>
             <a:r>
@@ -7430,6 +7400,13 @@
             <a:prstDash val="solid"/>
           </a:ln>
         </p:spPr>
+        <p:txBody>
+          <a:bodyPr/>
+          <a:lstStyle/>
+          <a:p>
+            <a:endParaRPr lang="en-US"/>
+          </a:p>
+        </p:txBody>
       </p:sp>
       <p:sp>
         <p:nvSpPr>
@@ -7455,13 +7432,20 @@
             <a:prstDash val="solid"/>
           </a:ln>
           <a:effectLst>
-            <a:outerShdw sx="100000" sy="100000" kx="0" ky="0" algn="bl" rotWithShape="0" blurRad="101600" dist="38100" dir="8100000">
+            <a:outerShdw blurRad="101600" dist="38100" dir="8100000" algn="bl" rotWithShape="0">
               <a:srgbClr val="000000">
                 <a:alpha val="10000"/>
               </a:srgbClr>
             </a:outerShdw>
           </a:effectLst>
         </p:spPr>
+        <p:txBody>
+          <a:bodyPr/>
+          <a:lstStyle/>
+          <a:p>
+            <a:endParaRPr lang="en-US"/>
+          </a:p>
+        </p:txBody>
       </p:sp>
       <p:sp>
         <p:nvSpPr>
@@ -7487,6 +7471,13 @@
             <a:prstDash val="solid"/>
           </a:ln>
         </p:spPr>
+        <p:txBody>
+          <a:bodyPr/>
+          <a:lstStyle/>
+          <a:p>
+            <a:endParaRPr lang="en-US"/>
+          </a:p>
+        </p:txBody>
       </p:sp>
       <p:sp>
         <p:nvSpPr>
@@ -7509,7 +7500,7 @@
           <a:bodyPr wrap="square" lIns="0" tIns="0" rIns="0" bIns="0" rtlCol="0" anchor="ctr"/>
           <a:lstStyle/>
           <a:p>
-            <a:pPr algn="ctr" indent="0" marL="0">
+            <a:pPr marL="0" indent="0" algn="ctr">
               <a:buNone/>
             </a:pPr>
             <a:r>
@@ -7548,7 +7539,7 @@
           <a:bodyPr wrap="square" lIns="0" tIns="0" rIns="0" bIns="0" rtlCol="0" anchor="ctr"/>
           <a:lstStyle/>
           <a:p>
-            <a:pPr algn="ctr" indent="0" marL="0">
+            <a:pPr marL="0" indent="0" algn="ctr">
               <a:buNone/>
             </a:pPr>
             <a:r>
@@ -7587,7 +7578,7 @@
           <a:bodyPr wrap="square" lIns="0" tIns="0" rIns="0" bIns="0" rtlCol="0" anchor="ctr"/>
           <a:lstStyle/>
           <a:p>
-            <a:pPr indent="0" marL="0">
+            <a:pPr marL="0" indent="0">
               <a:buNone/>
             </a:pPr>
             <a:r>
@@ -7629,13 +7620,20 @@
             <a:prstDash val="solid"/>
           </a:ln>
           <a:effectLst>
-            <a:outerShdw sx="100000" sy="100000" kx="0" ky="0" algn="bl" rotWithShape="0" blurRad="101600" dist="38100" dir="8100000">
+            <a:outerShdw blurRad="101600" dist="38100" dir="8100000" algn="bl" rotWithShape="0">
               <a:srgbClr val="000000">
                 <a:alpha val="10000"/>
               </a:srgbClr>
             </a:outerShdw>
           </a:effectLst>
         </p:spPr>
+        <p:txBody>
+          <a:bodyPr/>
+          <a:lstStyle/>
+          <a:p>
+            <a:endParaRPr lang="en-US"/>
+          </a:p>
+        </p:txBody>
       </p:sp>
       <p:sp>
         <p:nvSpPr>
@@ -7661,6 +7659,13 @@
             <a:prstDash val="solid"/>
           </a:ln>
         </p:spPr>
+        <p:txBody>
+          <a:bodyPr/>
+          <a:lstStyle/>
+          <a:p>
+            <a:endParaRPr lang="en-US"/>
+          </a:p>
+        </p:txBody>
       </p:sp>
       <p:sp>
         <p:nvSpPr>
@@ -7683,7 +7688,7 @@
           <a:bodyPr wrap="square" lIns="0" tIns="0" rIns="0" bIns="0" rtlCol="0" anchor="ctr"/>
           <a:lstStyle/>
           <a:p>
-            <a:pPr algn="ctr" indent="0" marL="0">
+            <a:pPr marL="0" indent="0" algn="ctr">
               <a:buNone/>
             </a:pPr>
             <a:r>
@@ -7722,7 +7727,7 @@
           <a:bodyPr wrap="square" lIns="0" tIns="0" rIns="0" bIns="0" rtlCol="0" anchor="ctr"/>
           <a:lstStyle/>
           <a:p>
-            <a:pPr algn="ctr" indent="0" marL="0">
+            <a:pPr marL="0" indent="0" algn="ctr">
               <a:buNone/>
             </a:pPr>
             <a:r>
@@ -7761,7 +7766,7 @@
           <a:bodyPr wrap="square" lIns="0" tIns="0" rIns="0" bIns="0" rtlCol="0" anchor="ctr"/>
           <a:lstStyle/>
           <a:p>
-            <a:pPr indent="0" marL="0">
+            <a:pPr marL="0" indent="0">
               <a:buNone/>
             </a:pPr>
             <a:r>
@@ -7803,13 +7808,20 @@
             <a:prstDash val="solid"/>
           </a:ln>
           <a:effectLst>
-            <a:outerShdw sx="100000" sy="100000" kx="0" ky="0" algn="bl" rotWithShape="0" blurRad="101600" dist="38100" dir="8100000">
+            <a:outerShdw blurRad="101600" dist="38100" dir="8100000" algn="bl" rotWithShape="0">
               <a:srgbClr val="000000">
                 <a:alpha val="10000"/>
               </a:srgbClr>
             </a:outerShdw>
           </a:effectLst>
         </p:spPr>
+        <p:txBody>
+          <a:bodyPr/>
+          <a:lstStyle/>
+          <a:p>
+            <a:endParaRPr lang="en-US"/>
+          </a:p>
+        </p:txBody>
       </p:sp>
       <p:sp>
         <p:nvSpPr>
@@ -7835,6 +7847,13 @@
             <a:prstDash val="solid"/>
           </a:ln>
         </p:spPr>
+        <p:txBody>
+          <a:bodyPr/>
+          <a:lstStyle/>
+          <a:p>
+            <a:endParaRPr lang="en-US"/>
+          </a:p>
+        </p:txBody>
       </p:sp>
       <p:sp>
         <p:nvSpPr>
@@ -7857,7 +7876,7 @@
           <a:bodyPr wrap="square" lIns="0" tIns="0" rIns="0" bIns="0" rtlCol="0" anchor="ctr"/>
           <a:lstStyle/>
           <a:p>
-            <a:pPr algn="ctr" indent="0" marL="0">
+            <a:pPr marL="0" indent="0" algn="ctr">
               <a:buNone/>
             </a:pPr>
             <a:r>
@@ -7896,7 +7915,7 @@
           <a:bodyPr wrap="square" lIns="0" tIns="0" rIns="0" bIns="0" rtlCol="0" anchor="ctr"/>
           <a:lstStyle/>
           <a:p>
-            <a:pPr algn="ctr" indent="0" marL="0">
+            <a:pPr marL="0" indent="0" algn="ctr">
               <a:buNone/>
             </a:pPr>
             <a:r>
@@ -7935,7 +7954,7 @@
           <a:bodyPr wrap="square" lIns="0" tIns="0" rIns="0" bIns="0" rtlCol="0" anchor="ctr"/>
           <a:lstStyle/>
           <a:p>
-            <a:pPr indent="0" marL="0">
+            <a:pPr marL="0" indent="0">
               <a:buNone/>
             </a:pPr>
             <a:r>
@@ -7969,6 +7988,7 @@
         <a:solidFill>
           <a:srgbClr val="FFFFFF"/>
         </a:solidFill>
+        <a:effectLst/>
       </p:bgPr>
     </p:bg>
     <p:spTree>
@@ -8006,7 +8026,7 @@
           <a:bodyPr wrap="square" lIns="0" tIns="0" rIns="0" bIns="0" rtlCol="0" anchor="ctr"/>
           <a:lstStyle/>
           <a:p>
-            <a:pPr indent="0" marL="0">
+            <a:pPr marL="0" indent="0">
               <a:buNone/>
             </a:pPr>
             <a:r>
@@ -8048,6 +8068,13 @@
             <a:prstDash val="solid"/>
           </a:ln>
         </p:spPr>
+        <p:txBody>
+          <a:bodyPr/>
+          <a:lstStyle/>
+          <a:p>
+            <a:endParaRPr lang="en-US"/>
+          </a:p>
+        </p:txBody>
       </p:sp>
       <p:sp>
         <p:nvSpPr>
@@ -8073,13 +8100,20 @@
             <a:prstDash val="solid"/>
           </a:ln>
           <a:effectLst>
-            <a:outerShdw sx="100000" sy="100000" kx="0" ky="0" algn="bl" rotWithShape="0" blurRad="101600" dist="38100" dir="8100000">
+            <a:outerShdw blurRad="101600" dist="38100" dir="8100000" algn="bl" rotWithShape="0">
               <a:srgbClr val="000000">
                 <a:alpha val="10000"/>
               </a:srgbClr>
             </a:outerShdw>
           </a:effectLst>
         </p:spPr>
+        <p:txBody>
+          <a:bodyPr/>
+          <a:lstStyle/>
+          <a:p>
+            <a:endParaRPr lang="en-US"/>
+          </a:p>
+        </p:txBody>
       </p:sp>
       <p:sp>
         <p:nvSpPr>
@@ -8102,7 +8136,7 @@
           <a:bodyPr wrap="square" lIns="0" tIns="0" rIns="0" bIns="0" rtlCol="0" anchor="ctr"/>
           <a:lstStyle/>
           <a:p>
-            <a:pPr indent="0" marL="0">
+            <a:pPr marL="0" indent="0">
               <a:buNone/>
             </a:pPr>
             <a:r>
@@ -8144,6 +8178,13 @@
             <a:prstDash val="solid"/>
           </a:ln>
         </p:spPr>
+        <p:txBody>
+          <a:bodyPr/>
+          <a:lstStyle/>
+          <a:p>
+            <a:endParaRPr lang="en-US"/>
+          </a:p>
+        </p:txBody>
       </p:sp>
       <p:sp>
         <p:nvSpPr>
@@ -8166,7 +8207,7 @@
           <a:bodyPr wrap="square" lIns="0" tIns="0" rIns="0" bIns="0" rtlCol="0" anchor="ctr"/>
           <a:lstStyle/>
           <a:p>
-            <a:pPr indent="0" marL="0">
+            <a:pPr marL="0" indent="0">
               <a:buNone/>
             </a:pPr>
             <a:r>
@@ -8208,6 +8249,13 @@
             <a:prstDash val="solid"/>
           </a:ln>
         </p:spPr>
+        <p:txBody>
+          <a:bodyPr/>
+          <a:lstStyle/>
+          <a:p>
+            <a:endParaRPr lang="en-US"/>
+          </a:p>
+        </p:txBody>
       </p:sp>
       <p:sp>
         <p:nvSpPr>
@@ -8230,7 +8278,7 @@
           <a:bodyPr wrap="square" lIns="0" tIns="0" rIns="0" bIns="0" rtlCol="0" anchor="ctr"/>
           <a:lstStyle/>
           <a:p>
-            <a:pPr indent="0" marL="0">
+            <a:pPr marL="0" indent="0">
               <a:buNone/>
             </a:pPr>
             <a:r>
@@ -8272,6 +8320,13 @@
             <a:prstDash val="solid"/>
           </a:ln>
         </p:spPr>
+        <p:txBody>
+          <a:bodyPr/>
+          <a:lstStyle/>
+          <a:p>
+            <a:endParaRPr lang="en-US"/>
+          </a:p>
+        </p:txBody>
       </p:sp>
       <p:sp>
         <p:nvSpPr>
@@ -8294,7 +8349,7 @@
           <a:bodyPr wrap="square" lIns="0" tIns="0" rIns="0" bIns="0" rtlCol="0" anchor="ctr"/>
           <a:lstStyle/>
           <a:p>
-            <a:pPr indent="0" marL="0">
+            <a:pPr marL="0" indent="0">
               <a:buNone/>
             </a:pPr>
             <a:r>
@@ -8336,6 +8391,13 @@
             <a:prstDash val="solid"/>
           </a:ln>
         </p:spPr>
+        <p:txBody>
+          <a:bodyPr/>
+          <a:lstStyle/>
+          <a:p>
+            <a:endParaRPr lang="en-US"/>
+          </a:p>
+        </p:txBody>
       </p:sp>
       <p:sp>
         <p:nvSpPr>
@@ -8358,7 +8420,7 @@
           <a:bodyPr wrap="square" lIns="0" tIns="0" rIns="0" bIns="0" rtlCol="0" anchor="ctr"/>
           <a:lstStyle/>
           <a:p>
-            <a:pPr indent="0" marL="0">
+            <a:pPr marL="0" indent="0">
               <a:buNone/>
             </a:pPr>
             <a:r>
@@ -8400,6 +8462,13 @@
             <a:prstDash val="solid"/>
           </a:ln>
         </p:spPr>
+        <p:txBody>
+          <a:bodyPr/>
+          <a:lstStyle/>
+          <a:p>
+            <a:endParaRPr lang="en-US"/>
+          </a:p>
+        </p:txBody>
       </p:sp>
       <p:sp>
         <p:nvSpPr>
@@ -8422,7 +8491,7 @@
           <a:bodyPr wrap="square" lIns="0" tIns="0" rIns="0" bIns="0" rtlCol="0" anchor="ctr"/>
           <a:lstStyle/>
           <a:p>
-            <a:pPr indent="0" marL="0">
+            <a:pPr marL="0" indent="0">
               <a:buNone/>
             </a:pPr>
             <a:r>
@@ -8464,13 +8533,20 @@
             <a:prstDash val="solid"/>
           </a:ln>
           <a:effectLst>
-            <a:outerShdw sx="100000" sy="100000" kx="0" ky="0" algn="bl" rotWithShape="0" blurRad="101600" dist="38100" dir="8100000">
+            <a:outerShdw blurRad="101600" dist="38100" dir="8100000" algn="bl" rotWithShape="0">
               <a:srgbClr val="000000">
                 <a:alpha val="10000"/>
               </a:srgbClr>
             </a:outerShdw>
           </a:effectLst>
         </p:spPr>
+        <p:txBody>
+          <a:bodyPr/>
+          <a:lstStyle/>
+          <a:p>
+            <a:endParaRPr lang="en-US"/>
+          </a:p>
+        </p:txBody>
       </p:sp>
       <p:sp>
         <p:nvSpPr>
@@ -8493,7 +8569,7 @@
           <a:bodyPr wrap="square" lIns="0" tIns="0" rIns="0" bIns="0" rtlCol="0" anchor="ctr"/>
           <a:lstStyle/>
           <a:p>
-            <a:pPr indent="0" marL="0">
+            <a:pPr marL="0" indent="0">
               <a:buNone/>
             </a:pPr>
             <a:r>
@@ -8535,6 +8611,13 @@
             <a:prstDash val="solid"/>
           </a:ln>
         </p:spPr>
+        <p:txBody>
+          <a:bodyPr/>
+          <a:lstStyle/>
+          <a:p>
+            <a:endParaRPr lang="en-US"/>
+          </a:p>
+        </p:txBody>
       </p:sp>
       <p:sp>
         <p:nvSpPr>
@@ -8557,7 +8640,7 @@
           <a:bodyPr wrap="square" lIns="0" tIns="0" rIns="0" bIns="0" rtlCol="0" anchor="ctr"/>
           <a:lstStyle/>
           <a:p>
-            <a:pPr indent="0" marL="0">
+            <a:pPr marL="0" indent="0">
               <a:buNone/>
             </a:pPr>
             <a:r>
@@ -8599,6 +8682,13 @@
             <a:prstDash val="solid"/>
           </a:ln>
         </p:spPr>
+        <p:txBody>
+          <a:bodyPr/>
+          <a:lstStyle/>
+          <a:p>
+            <a:endParaRPr lang="en-US"/>
+          </a:p>
+        </p:txBody>
       </p:sp>
       <p:sp>
         <p:nvSpPr>
@@ -8621,7 +8711,7 @@
           <a:bodyPr wrap="square" lIns="0" tIns="0" rIns="0" bIns="0" rtlCol="0" anchor="ctr"/>
           <a:lstStyle/>
           <a:p>
-            <a:pPr indent="0" marL="0">
+            <a:pPr marL="0" indent="0">
               <a:buNone/>
             </a:pPr>
             <a:r>
@@ -8663,6 +8753,13 @@
             <a:prstDash val="solid"/>
           </a:ln>
         </p:spPr>
+        <p:txBody>
+          <a:bodyPr/>
+          <a:lstStyle/>
+          <a:p>
+            <a:endParaRPr lang="en-US"/>
+          </a:p>
+        </p:txBody>
       </p:sp>
       <p:sp>
         <p:nvSpPr>
@@ -8685,7 +8782,7 @@
           <a:bodyPr wrap="square" lIns="0" tIns="0" rIns="0" bIns="0" rtlCol="0" anchor="ctr"/>
           <a:lstStyle/>
           <a:p>
-            <a:pPr indent="0" marL="0">
+            <a:pPr marL="0" indent="0">
               <a:buNone/>
             </a:pPr>
             <a:r>
@@ -8727,6 +8824,13 @@
             <a:prstDash val="solid"/>
           </a:ln>
         </p:spPr>
+        <p:txBody>
+          <a:bodyPr/>
+          <a:lstStyle/>
+          <a:p>
+            <a:endParaRPr lang="en-US"/>
+          </a:p>
+        </p:txBody>
       </p:sp>
       <p:sp>
         <p:nvSpPr>
@@ -8749,7 +8853,7 @@
           <a:bodyPr wrap="square" lIns="0" tIns="0" rIns="0" bIns="0" rtlCol="0" anchor="ctr"/>
           <a:lstStyle/>
           <a:p>
-            <a:pPr indent="0" marL="0">
+            <a:pPr marL="0" indent="0">
               <a:buNone/>
             </a:pPr>
             <a:r>
@@ -8791,6 +8895,13 @@
             <a:prstDash val="solid"/>
           </a:ln>
         </p:spPr>
+        <p:txBody>
+          <a:bodyPr/>
+          <a:lstStyle/>
+          <a:p>
+            <a:endParaRPr lang="en-US"/>
+          </a:p>
+        </p:txBody>
       </p:sp>
       <p:sp>
         <p:nvSpPr>
@@ -8813,7 +8924,7 @@
           <a:bodyPr wrap="square" lIns="0" tIns="0" rIns="0" bIns="0" rtlCol="0" anchor="ctr"/>
           <a:lstStyle/>
           <a:p>
-            <a:pPr indent="0" marL="0">
+            <a:pPr marL="0" indent="0">
               <a:buNone/>
             </a:pPr>
             <a:r>
@@ -8847,6 +8958,7 @@
         <a:solidFill>
           <a:srgbClr val="FFFFFF"/>
         </a:solidFill>
+        <a:effectLst/>
       </p:bgPr>
     </p:bg>
     <p:spTree>
@@ -8884,7 +8996,7 @@
           <a:bodyPr wrap="square" lIns="0" tIns="0" rIns="0" bIns="0" rtlCol="0" anchor="ctr"/>
           <a:lstStyle/>
           <a:p>
-            <a:pPr indent="0" marL="0">
+            <a:pPr marL="0" indent="0">
               <a:buNone/>
             </a:pPr>
             <a:r>
@@ -8926,6 +9038,13 @@
             <a:prstDash val="solid"/>
           </a:ln>
         </p:spPr>
+        <p:txBody>
+          <a:bodyPr/>
+          <a:lstStyle/>
+          <a:p>
+            <a:endParaRPr lang="en-US"/>
+          </a:p>
+        </p:txBody>
       </p:sp>
       <p:graphicFrame>
         <p:nvGraphicFramePr>
@@ -8950,9 +9069,27 @@
             <a:tbl>
               <a:tblPr/>
               <a:tblGrid>
-                <a:gridCol w="1417320"/>
-                <a:gridCol w="1783080"/>
-                <a:gridCol w="5212080"/>
+                <a:gridCol w="1417320">
+                  <a:extLst>
+                    <a:ext uri="{9D8B030D-6E8A-4147-A177-3AD203B41FA5}">
+                      <a16:colId xmlns:a16="http://schemas.microsoft.com/office/drawing/2014/main" val="20000"/>
+                    </a:ext>
+                  </a:extLst>
+                </a:gridCol>
+                <a:gridCol w="1783080">
+                  <a:extLst>
+                    <a:ext uri="{9D8B030D-6E8A-4147-A177-3AD203B41FA5}">
+                      <a16:colId xmlns:a16="http://schemas.microsoft.com/office/drawing/2014/main" val="20001"/>
+                    </a:ext>
+                  </a:extLst>
+                </a:gridCol>
+                <a:gridCol w="5212080">
+                  <a:extLst>
+                    <a:ext uri="{9D8B030D-6E8A-4147-A177-3AD203B41FA5}">
+                      <a16:colId xmlns:a16="http://schemas.microsoft.com/office/drawing/2014/main" val="20002"/>
+                    </a:ext>
+                  </a:extLst>
+                </a:gridCol>
               </a:tblGrid>
               <a:tr h="502920">
                 <a:tc>
@@ -8960,7 +9097,7 @@
                     <a:bodyPr/>
                     <a:lstStyle/>
                     <a:p>
-                      <a:pPr algn="ctr" indent="0" marL="0">
+                      <a:pPr marL="0" indent="0" algn="ctr">
                         <a:buNone/>
                       </a:pPr>
                       <a:r>
@@ -8981,7 +9118,7 @@
                       </a:endParaRPr>
                     </a:p>
                   </a:txBody>
-                  <a:tcPr marL="91440" marR="91440" marT="45720" marB="45720">
+                  <a:tcPr>
                     <a:lnL w="12700" cap="flat" cmpd="sng" algn="ctr">
                       <a:solidFill>
                         <a:srgbClr val="E2E8F0"/>
@@ -9028,7 +9165,7 @@
                     <a:bodyPr/>
                     <a:lstStyle/>
                     <a:p>
-                      <a:pPr algn="ctr" indent="0" marL="0">
+                      <a:pPr marL="0" indent="0" algn="ctr">
                         <a:buNone/>
                       </a:pPr>
                       <a:r>
@@ -9049,7 +9186,7 @@
                       </a:endParaRPr>
                     </a:p>
                   </a:txBody>
-                  <a:tcPr marL="91440" marR="91440" marT="45720" marB="45720">
+                  <a:tcPr>
                     <a:lnL w="12700" cap="flat" cmpd="sng" algn="ctr">
                       <a:solidFill>
                         <a:srgbClr val="E2E8F0"/>
@@ -9096,7 +9233,7 @@
                     <a:bodyPr/>
                     <a:lstStyle/>
                     <a:p>
-                      <a:pPr algn="ctr" indent="0" marL="0">
+                      <a:pPr marL="0" indent="0" algn="ctr">
                         <a:buNone/>
                       </a:pPr>
                       <a:r>
@@ -9117,7 +9254,7 @@
                       </a:endParaRPr>
                     </a:p>
                   </a:txBody>
-                  <a:tcPr marL="91440" marR="91440" marT="45720" marB="45720">
+                  <a:tcPr>
                     <a:lnL w="12700" cap="flat" cmpd="sng" algn="ctr">
                       <a:solidFill>
                         <a:srgbClr val="E2E8F0"/>
@@ -9159,6 +9296,11 @@
                     </a:solidFill>
                   </a:tcPr>
                 </a:tc>
+                <a:extLst>
+                  <a:ext uri="{0D108BD9-81ED-4DB2-BD59-A6C34878D82A}">
+                    <a16:rowId xmlns:a16="http://schemas.microsoft.com/office/drawing/2014/main" val="10000"/>
+                  </a:ext>
+                </a:extLst>
               </a:tr>
               <a:tr h="676656">
                 <a:tc>
@@ -9166,7 +9308,7 @@
                     <a:bodyPr/>
                     <a:lstStyle/>
                     <a:p>
-                      <a:pPr algn="l" indent="0" marL="0">
+                      <a:pPr marL="0" indent="0" algn="l">
                         <a:buNone/>
                       </a:pPr>
                       <a:r>
@@ -9187,7 +9329,7 @@
                       </a:endParaRPr>
                     </a:p>
                   </a:txBody>
-                  <a:tcPr marL="91440" marR="91440" marT="45720" marB="45720">
+                  <a:tcPr>
                     <a:lnL w="12700" cap="flat" cmpd="sng" algn="ctr">
                       <a:solidFill>
                         <a:srgbClr val="E2E8F0"/>
@@ -9231,7 +9373,7 @@
                     <a:bodyPr/>
                     <a:lstStyle/>
                     <a:p>
-                      <a:pPr algn="l" indent="0" marL="0">
+                      <a:pPr marL="0" indent="0" algn="l">
                         <a:buNone/>
                       </a:pPr>
                       <a:r>
@@ -9252,7 +9394,7 @@
                       </a:endParaRPr>
                     </a:p>
                   </a:txBody>
-                  <a:tcPr marL="91440" marR="91440" marT="45720" marB="45720">
+                  <a:tcPr>
                     <a:lnL w="12700" cap="flat" cmpd="sng" algn="ctr">
                       <a:solidFill>
                         <a:srgbClr val="E2E8F0"/>
@@ -9296,7 +9438,7 @@
                     <a:bodyPr/>
                     <a:lstStyle/>
                     <a:p>
-                      <a:pPr algn="l" indent="0" marL="0">
+                      <a:pPr marL="0" indent="0" algn="l">
                         <a:buNone/>
                       </a:pPr>
                       <a:r>
@@ -9317,7 +9459,7 @@
                       </a:endParaRPr>
                     </a:p>
                   </a:txBody>
-                  <a:tcPr marL="91440" marR="91440" marT="45720" marB="45720">
+                  <a:tcPr>
                     <a:lnL w="12700" cap="flat" cmpd="sng" algn="ctr">
                       <a:solidFill>
                         <a:srgbClr val="E2E8F0"/>
@@ -9356,6 +9498,11 @@
                     </a:lnB>
                   </a:tcPr>
                 </a:tc>
+                <a:extLst>
+                  <a:ext uri="{0D108BD9-81ED-4DB2-BD59-A6C34878D82A}">
+                    <a16:rowId xmlns:a16="http://schemas.microsoft.com/office/drawing/2014/main" val="10001"/>
+                  </a:ext>
+                </a:extLst>
               </a:tr>
               <a:tr h="676656">
                 <a:tc>
@@ -9363,7 +9510,7 @@
                     <a:bodyPr/>
                     <a:lstStyle/>
                     <a:p>
-                      <a:pPr algn="l" indent="0" marL="0">
+                      <a:pPr marL="0" indent="0" algn="l">
                         <a:buNone/>
                       </a:pPr>
                       <a:r>
@@ -9384,7 +9531,7 @@
                       </a:endParaRPr>
                     </a:p>
                   </a:txBody>
-                  <a:tcPr marL="91440" marR="91440" marT="45720" marB="45720">
+                  <a:tcPr>
                     <a:lnL w="12700" cap="flat" cmpd="sng" algn="ctr">
                       <a:solidFill>
                         <a:srgbClr val="E2E8F0"/>
@@ -9428,7 +9575,7 @@
                     <a:bodyPr/>
                     <a:lstStyle/>
                     <a:p>
-                      <a:pPr algn="l" indent="0" marL="0">
+                      <a:pPr marL="0" indent="0" algn="l">
                         <a:buNone/>
                       </a:pPr>
                       <a:r>
@@ -9449,7 +9596,7 @@
                       </a:endParaRPr>
                     </a:p>
                   </a:txBody>
-                  <a:tcPr marL="91440" marR="91440" marT="45720" marB="45720">
+                  <a:tcPr>
                     <a:lnL w="12700" cap="flat" cmpd="sng" algn="ctr">
                       <a:solidFill>
                         <a:srgbClr val="E2E8F0"/>
@@ -9493,7 +9640,7 @@
                     <a:bodyPr/>
                     <a:lstStyle/>
                     <a:p>
-                      <a:pPr algn="l" indent="0" marL="0">
+                      <a:pPr marL="0" indent="0" algn="l">
                         <a:buNone/>
                       </a:pPr>
                       <a:r>
@@ -9514,7 +9661,7 @@
                       </a:endParaRPr>
                     </a:p>
                   </a:txBody>
-                  <a:tcPr marL="91440" marR="91440" marT="45720" marB="45720">
+                  <a:tcPr>
                     <a:lnL w="12700" cap="flat" cmpd="sng" algn="ctr">
                       <a:solidFill>
                         <a:srgbClr val="E2E8F0"/>
@@ -9553,6 +9700,11 @@
                     </a:lnB>
                   </a:tcPr>
                 </a:tc>
+                <a:extLst>
+                  <a:ext uri="{0D108BD9-81ED-4DB2-BD59-A6C34878D82A}">
+                    <a16:rowId xmlns:a16="http://schemas.microsoft.com/office/drawing/2014/main" val="10002"/>
+                  </a:ext>
+                </a:extLst>
               </a:tr>
               <a:tr h="676656">
                 <a:tc>
@@ -9560,7 +9712,7 @@
                     <a:bodyPr/>
                     <a:lstStyle/>
                     <a:p>
-                      <a:pPr algn="l" indent="0" marL="0">
+                      <a:pPr marL="0" indent="0" algn="l">
                         <a:buNone/>
                       </a:pPr>
                       <a:r>
@@ -9581,7 +9733,7 @@
                       </a:endParaRPr>
                     </a:p>
                   </a:txBody>
-                  <a:tcPr marL="91440" marR="91440" marT="45720" marB="45720">
+                  <a:tcPr>
                     <a:lnL w="12700" cap="flat" cmpd="sng" algn="ctr">
                       <a:solidFill>
                         <a:srgbClr val="E2E8F0"/>
@@ -9625,7 +9777,7 @@
                     <a:bodyPr/>
                     <a:lstStyle/>
                     <a:p>
-                      <a:pPr algn="l" indent="0" marL="0">
+                      <a:pPr marL="0" indent="0" algn="l">
                         <a:buNone/>
                       </a:pPr>
                       <a:r>
@@ -9646,7 +9798,7 @@
                       </a:endParaRPr>
                     </a:p>
                   </a:txBody>
-                  <a:tcPr marL="91440" marR="91440" marT="45720" marB="45720">
+                  <a:tcPr>
                     <a:lnL w="12700" cap="flat" cmpd="sng" algn="ctr">
                       <a:solidFill>
                         <a:srgbClr val="E2E8F0"/>
@@ -9690,7 +9842,7 @@
                     <a:bodyPr/>
                     <a:lstStyle/>
                     <a:p>
-                      <a:pPr algn="l" indent="0" marL="0">
+                      <a:pPr marL="0" indent="0" algn="l">
                         <a:buNone/>
                       </a:pPr>
                       <a:r>
@@ -9711,7 +9863,7 @@
                       </a:endParaRPr>
                     </a:p>
                   </a:txBody>
-                  <a:tcPr marL="91440" marR="91440" marT="45720" marB="45720">
+                  <a:tcPr>
                     <a:lnL w="12700" cap="flat" cmpd="sng" algn="ctr">
                       <a:solidFill>
                         <a:srgbClr val="E2E8F0"/>
@@ -9750,6 +9902,11 @@
                     </a:lnB>
                   </a:tcPr>
                 </a:tc>
+                <a:extLst>
+                  <a:ext uri="{0D108BD9-81ED-4DB2-BD59-A6C34878D82A}">
+                    <a16:rowId xmlns:a16="http://schemas.microsoft.com/office/drawing/2014/main" val="10003"/>
+                  </a:ext>
+                </a:extLst>
               </a:tr>
               <a:tr h="676656">
                 <a:tc>
@@ -9757,7 +9914,7 @@
                     <a:bodyPr/>
                     <a:lstStyle/>
                     <a:p>
-                      <a:pPr algn="l" indent="0" marL="0">
+                      <a:pPr marL="0" indent="0" algn="l">
                         <a:buNone/>
                       </a:pPr>
                       <a:r>
@@ -9778,7 +9935,7 @@
                       </a:endParaRPr>
                     </a:p>
                   </a:txBody>
-                  <a:tcPr marL="91440" marR="91440" marT="45720" marB="45720">
+                  <a:tcPr>
                     <a:lnL w="12700" cap="flat" cmpd="sng" algn="ctr">
                       <a:solidFill>
                         <a:srgbClr val="E2E8F0"/>
@@ -9822,7 +9979,7 @@
                     <a:bodyPr/>
                     <a:lstStyle/>
                     <a:p>
-                      <a:pPr algn="l" indent="0" marL="0">
+                      <a:pPr marL="0" indent="0" algn="l">
                         <a:buNone/>
                       </a:pPr>
                       <a:r>
@@ -9843,7 +10000,7 @@
                       </a:endParaRPr>
                     </a:p>
                   </a:txBody>
-                  <a:tcPr marL="91440" marR="91440" marT="45720" marB="45720">
+                  <a:tcPr>
                     <a:lnL w="12700" cap="flat" cmpd="sng" algn="ctr">
                       <a:solidFill>
                         <a:srgbClr val="E2E8F0"/>
@@ -9887,7 +10044,7 @@
                     <a:bodyPr/>
                     <a:lstStyle/>
                     <a:p>
-                      <a:pPr algn="l" indent="0" marL="0">
+                      <a:pPr marL="0" indent="0" algn="l">
                         <a:buNone/>
                       </a:pPr>
                       <a:r>
@@ -9908,7 +10065,7 @@
                       </a:endParaRPr>
                     </a:p>
                   </a:txBody>
-                  <a:tcPr marL="91440" marR="91440" marT="45720" marB="45720">
+                  <a:tcPr>
                     <a:lnL w="12700" cap="flat" cmpd="sng" algn="ctr">
                       <a:solidFill>
                         <a:srgbClr val="E2E8F0"/>
@@ -9947,6 +10104,11 @@
                     </a:lnB>
                   </a:tcPr>
                 </a:tc>
+                <a:extLst>
+                  <a:ext uri="{0D108BD9-81ED-4DB2-BD59-A6C34878D82A}">
+                    <a16:rowId xmlns:a16="http://schemas.microsoft.com/office/drawing/2014/main" val="10004"/>
+                  </a:ext>
+                </a:extLst>
               </a:tr>
               <a:tr h="676656">
                 <a:tc>
@@ -9954,7 +10116,7 @@
                     <a:bodyPr/>
                     <a:lstStyle/>
                     <a:p>
-                      <a:pPr algn="l" indent="0" marL="0">
+                      <a:pPr marL="0" indent="0" algn="l">
                         <a:buNone/>
                       </a:pPr>
                       <a:r>
@@ -9975,7 +10137,7 @@
                       </a:endParaRPr>
                     </a:p>
                   </a:txBody>
-                  <a:tcPr marL="91440" marR="91440" marT="45720" marB="45720">
+                  <a:tcPr>
                     <a:lnL w="12700" cap="flat" cmpd="sng" algn="ctr">
                       <a:solidFill>
                         <a:srgbClr val="E2E8F0"/>
@@ -10019,7 +10181,7 @@
                     <a:bodyPr/>
                     <a:lstStyle/>
                     <a:p>
-                      <a:pPr algn="l" indent="0" marL="0">
+                      <a:pPr marL="0" indent="0" algn="l">
                         <a:buNone/>
                       </a:pPr>
                       <a:r>
@@ -10040,7 +10202,7 @@
                       </a:endParaRPr>
                     </a:p>
                   </a:txBody>
-                  <a:tcPr marL="91440" marR="91440" marT="45720" marB="45720">
+                  <a:tcPr>
                     <a:lnL w="12700" cap="flat" cmpd="sng" algn="ctr">
                       <a:solidFill>
                         <a:srgbClr val="E2E8F0"/>
@@ -10084,7 +10246,7 @@
                     <a:bodyPr/>
                     <a:lstStyle/>
                     <a:p>
-                      <a:pPr algn="l" indent="0" marL="0">
+                      <a:pPr marL="0" indent="0" algn="l">
                         <a:buNone/>
                       </a:pPr>
                       <a:r>
@@ -10105,7 +10267,7 @@
                       </a:endParaRPr>
                     </a:p>
                   </a:txBody>
-                  <a:tcPr marL="91440" marR="91440" marT="45720" marB="45720">
+                  <a:tcPr>
                     <a:lnL w="12700" cap="flat" cmpd="sng" algn="ctr">
                       <a:solidFill>
                         <a:srgbClr val="E2E8F0"/>
@@ -10144,6 +10306,11 @@
                     </a:lnB>
                   </a:tcPr>
                 </a:tc>
+                <a:extLst>
+                  <a:ext uri="{0D108BD9-81ED-4DB2-BD59-A6C34878D82A}">
+                    <a16:rowId xmlns:a16="http://schemas.microsoft.com/office/drawing/2014/main" val="10005"/>
+                  </a:ext>
+                </a:extLst>
               </a:tr>
             </a:tbl>
           </a:graphicData>
@@ -10165,6 +10332,7 @@
         <a:solidFill>
           <a:srgbClr val="FFFFFF"/>
         </a:solidFill>
+        <a:effectLst/>
       </p:bgPr>
     </p:bg>
     <p:spTree>
@@ -10202,7 +10370,7 @@
           <a:bodyPr wrap="square" lIns="0" tIns="0" rIns="0" bIns="0" rtlCol="0" anchor="ctr"/>
           <a:lstStyle/>
           <a:p>
-            <a:pPr indent="0" marL="0">
+            <a:pPr marL="0" indent="0">
               <a:buNone/>
             </a:pPr>
             <a:r>
@@ -10244,6 +10412,13 @@
             <a:prstDash val="solid"/>
           </a:ln>
         </p:spPr>
+        <p:txBody>
+          <a:bodyPr/>
+          <a:lstStyle/>
+          <a:p>
+            <a:endParaRPr lang="en-US"/>
+          </a:p>
+        </p:txBody>
       </p:sp>
       <p:sp>
         <p:nvSpPr>
@@ -10266,7 +10441,7 @@
           <a:bodyPr wrap="square" lIns="0" tIns="0" rIns="0" bIns="0" rtlCol="0" anchor="ctr"/>
           <a:lstStyle/>
           <a:p>
-            <a:pPr indent="0" marL="0">
+            <a:pPr marL="0" indent="0">
               <a:buNone/>
             </a:pPr>
             <a:r>
@@ -10305,7 +10480,7 @@
           <a:bodyPr wrap="square" lIns="0" tIns="0" rIns="0" bIns="0" rtlCol="0" anchor="ctr"/>
           <a:lstStyle/>
           <a:p>
-            <a:pPr indent="0" marL="0">
+            <a:pPr marL="0" indent="0">
               <a:buNone/>
             </a:pPr>
             <a:r>
@@ -10344,7 +10519,7 @@
           <a:bodyPr wrap="square" lIns="0" tIns="0" rIns="0" bIns="0" rtlCol="0" anchor="ctr"/>
           <a:lstStyle/>
           <a:p>
-            <a:pPr indent="0" marL="0">
+            <a:pPr marL="0" indent="0">
               <a:buNone/>
             </a:pPr>
             <a:r>
@@ -10383,7 +10558,7 @@
           <a:bodyPr wrap="square" lIns="0" tIns="0" rIns="0" bIns="0" rtlCol="0" anchor="ctr"/>
           <a:lstStyle/>
           <a:p>
-            <a:pPr indent="0" marL="0">
+            <a:pPr marL="0" indent="0">
               <a:buNone/>
             </a:pPr>
             <a:r>
@@ -10422,7 +10597,7 @@
           <a:bodyPr wrap="square" lIns="0" tIns="0" rIns="0" bIns="0" rtlCol="0" anchor="ctr"/>
           <a:lstStyle/>
           <a:p>
-            <a:pPr indent="0" marL="0">
+            <a:pPr marL="0" indent="0">
               <a:buNone/>
             </a:pPr>
             <a:r>
@@ -10461,7 +10636,7 @@
           <a:bodyPr wrap="square" lIns="0" tIns="0" rIns="0" bIns="0" rtlCol="0" anchor="ctr"/>
           <a:lstStyle/>
           <a:p>
-            <a:pPr indent="0" marL="0">
+            <a:pPr marL="0" indent="0">
               <a:buNone/>
             </a:pPr>
             <a:r>
@@ -10500,7 +10675,7 @@
           <a:bodyPr wrap="square" lIns="0" tIns="0" rIns="0" bIns="0" rtlCol="0" anchor="ctr"/>
           <a:lstStyle/>
           <a:p>
-            <a:pPr indent="0" marL="0">
+            <a:pPr marL="0" indent="0">
               <a:buNone/>
             </a:pPr>
             <a:r>
@@ -10539,7 +10714,7 @@
           <a:bodyPr wrap="square" lIns="0" tIns="0" rIns="0" bIns="0" rtlCol="0" anchor="ctr"/>
           <a:lstStyle/>
           <a:p>
-            <a:pPr indent="0" marL="0">
+            <a:pPr marL="0" indent="0">
               <a:buNone/>
             </a:pPr>
             <a:r>
@@ -10573,6 +10748,7 @@
         <a:solidFill>
           <a:srgbClr val="F0F4F8"/>
         </a:solidFill>
+        <a:effectLst/>
       </p:bgPr>
     </p:bg>
     <p:spTree>
@@ -10610,7 +10786,7 @@
           <a:bodyPr wrap="square" lIns="0" tIns="0" rIns="0" bIns="0" rtlCol="0" anchor="ctr"/>
           <a:lstStyle/>
           <a:p>
-            <a:pPr indent="0" marL="0">
+            <a:pPr marL="0" indent="0">
               <a:buNone/>
             </a:pPr>
             <a:r>
@@ -10652,13 +10828,20 @@
             <a:prstDash val="solid"/>
           </a:ln>
           <a:effectLst>
-            <a:outerShdw sx="100000" sy="100000" kx="0" ky="0" algn="bl" rotWithShape="0" blurRad="101600" dist="38100" dir="8100000">
+            <a:outerShdw blurRad="101600" dist="38100" dir="8100000" algn="bl" rotWithShape="0">
               <a:srgbClr val="000000">
                 <a:alpha val="10000"/>
               </a:srgbClr>
             </a:outerShdw>
           </a:effectLst>
         </p:spPr>
+        <p:txBody>
+          <a:bodyPr/>
+          <a:lstStyle/>
+          <a:p>
+            <a:endParaRPr lang="en-US"/>
+          </a:p>
+        </p:txBody>
       </p:sp>
       <p:sp>
         <p:nvSpPr>
@@ -10684,6 +10867,13 @@
             <a:prstDash val="solid"/>
           </a:ln>
         </p:spPr>
+        <p:txBody>
+          <a:bodyPr/>
+          <a:lstStyle/>
+          <a:p>
+            <a:endParaRPr lang="en-US"/>
+          </a:p>
+        </p:txBody>
       </p:sp>
       <p:sp>
         <p:nvSpPr>
@@ -10706,7 +10896,7 @@
           <a:bodyPr wrap="square" lIns="0" tIns="0" rIns="0" bIns="0" rtlCol="0" anchor="ctr"/>
           <a:lstStyle/>
           <a:p>
-            <a:pPr indent="0" marL="0">
+            <a:pPr marL="0" indent="0">
               <a:buNone/>
             </a:pPr>
             <a:r>
@@ -10745,7 +10935,7 @@
           <a:bodyPr wrap="square" lIns="0" tIns="0" rIns="0" bIns="0" rtlCol="0" anchor="ctr"/>
           <a:lstStyle/>
           <a:p>
-            <a:pPr indent="0" marL="0">
+            <a:pPr marL="0" indent="0">
               <a:buNone/>
             </a:pPr>
             <a:r>
@@ -10784,7 +10974,7 @@
           <a:bodyPr wrap="square" lIns="0" tIns="0" rIns="0" bIns="0" rtlCol="0" anchor="ctr"/>
           <a:lstStyle/>
           <a:p>
-            <a:pPr indent="0" marL="0">
+            <a:pPr marL="0" indent="0">
               <a:buNone/>
             </a:pPr>
             <a:r>
@@ -10826,13 +11016,20 @@
             <a:prstDash val="solid"/>
           </a:ln>
           <a:effectLst>
-            <a:outerShdw sx="100000" sy="100000" kx="0" ky="0" algn="bl" rotWithShape="0" blurRad="101600" dist="38100" dir="8100000">
+            <a:outerShdw blurRad="101600" dist="38100" dir="8100000" algn="bl" rotWithShape="0">
               <a:srgbClr val="000000">
                 <a:alpha val="10000"/>
               </a:srgbClr>
             </a:outerShdw>
           </a:effectLst>
         </p:spPr>
+        <p:txBody>
+          <a:bodyPr/>
+          <a:lstStyle/>
+          <a:p>
+            <a:endParaRPr lang="en-US"/>
+          </a:p>
+        </p:txBody>
       </p:sp>
       <p:sp>
         <p:nvSpPr>
@@ -10858,6 +11055,13 @@
             <a:prstDash val="solid"/>
           </a:ln>
         </p:spPr>
+        <p:txBody>
+          <a:bodyPr/>
+          <a:lstStyle/>
+          <a:p>
+            <a:endParaRPr lang="en-US"/>
+          </a:p>
+        </p:txBody>
       </p:sp>
       <p:sp>
         <p:nvSpPr>
@@ -10880,7 +11084,7 @@
           <a:bodyPr wrap="square" lIns="0" tIns="0" rIns="0" bIns="0" rtlCol="0" anchor="ctr"/>
           <a:lstStyle/>
           <a:p>
-            <a:pPr indent="0" marL="0">
+            <a:pPr marL="0" indent="0">
               <a:buNone/>
             </a:pPr>
             <a:r>
@@ -10919,7 +11123,7 @@
           <a:bodyPr wrap="square" lIns="0" tIns="0" rIns="0" bIns="0" rtlCol="0" anchor="ctr"/>
           <a:lstStyle/>
           <a:p>
-            <a:pPr indent="0" marL="0">
+            <a:pPr marL="0" indent="0">
               <a:buNone/>
             </a:pPr>
             <a:r>
@@ -10958,7 +11162,7 @@
           <a:bodyPr wrap="square" lIns="0" tIns="0" rIns="0" bIns="0" rtlCol="0" anchor="ctr"/>
           <a:lstStyle/>
           <a:p>
-            <a:pPr indent="0" marL="0">
+            <a:pPr marL="0" indent="0">
               <a:buNone/>
             </a:pPr>
             <a:r>
@@ -11000,13 +11204,20 @@
             <a:prstDash val="solid"/>
           </a:ln>
           <a:effectLst>
-            <a:outerShdw sx="100000" sy="100000" kx="0" ky="0" algn="bl" rotWithShape="0" blurRad="101600" dist="38100" dir="8100000">
+            <a:outerShdw blurRad="101600" dist="38100" dir="8100000" algn="bl" rotWithShape="0">
               <a:srgbClr val="000000">
                 <a:alpha val="10000"/>
               </a:srgbClr>
             </a:outerShdw>
           </a:effectLst>
         </p:spPr>
+        <p:txBody>
+          <a:bodyPr/>
+          <a:lstStyle/>
+          <a:p>
+            <a:endParaRPr lang="en-US"/>
+          </a:p>
+        </p:txBody>
       </p:sp>
       <p:sp>
         <p:nvSpPr>
@@ -11032,6 +11243,13 @@
             <a:prstDash val="solid"/>
           </a:ln>
         </p:spPr>
+        <p:txBody>
+          <a:bodyPr/>
+          <a:lstStyle/>
+          <a:p>
+            <a:endParaRPr lang="en-US"/>
+          </a:p>
+        </p:txBody>
       </p:sp>
       <p:sp>
         <p:nvSpPr>
@@ -11054,7 +11272,7 @@
           <a:bodyPr wrap="square" lIns="0" tIns="0" rIns="0" bIns="0" rtlCol="0" anchor="ctr"/>
           <a:lstStyle/>
           <a:p>
-            <a:pPr indent="0" marL="0">
+            <a:pPr marL="0" indent="0">
               <a:buNone/>
             </a:pPr>
             <a:r>
@@ -11093,7 +11311,7 @@
           <a:bodyPr wrap="square" lIns="0" tIns="0" rIns="0" bIns="0" rtlCol="0" anchor="ctr"/>
           <a:lstStyle/>
           <a:p>
-            <a:pPr indent="0" marL="0">
+            <a:pPr marL="0" indent="0">
               <a:buNone/>
             </a:pPr>
             <a:r>
@@ -11132,7 +11350,7 @@
           <a:bodyPr wrap="square" lIns="0" tIns="0" rIns="0" bIns="0" rtlCol="0" anchor="ctr"/>
           <a:lstStyle/>
           <a:p>
-            <a:pPr indent="0" marL="0">
+            <a:pPr marL="0" indent="0">
               <a:buNone/>
             </a:pPr>
             <a:r>
@@ -11174,13 +11392,20 @@
             <a:prstDash val="solid"/>
           </a:ln>
           <a:effectLst>
-            <a:outerShdw sx="100000" sy="100000" kx="0" ky="0" algn="bl" rotWithShape="0" blurRad="101600" dist="38100" dir="8100000">
+            <a:outerShdw blurRad="101600" dist="38100" dir="8100000" algn="bl" rotWithShape="0">
               <a:srgbClr val="000000">
                 <a:alpha val="10000"/>
               </a:srgbClr>
             </a:outerShdw>
           </a:effectLst>
         </p:spPr>
+        <p:txBody>
+          <a:bodyPr/>
+          <a:lstStyle/>
+          <a:p>
+            <a:endParaRPr lang="en-US"/>
+          </a:p>
+        </p:txBody>
       </p:sp>
       <p:sp>
         <p:nvSpPr>
@@ -11206,6 +11431,13 @@
             <a:prstDash val="solid"/>
           </a:ln>
         </p:spPr>
+        <p:txBody>
+          <a:bodyPr/>
+          <a:lstStyle/>
+          <a:p>
+            <a:endParaRPr lang="en-US"/>
+          </a:p>
+        </p:txBody>
       </p:sp>
       <p:sp>
         <p:nvSpPr>
@@ -11228,7 +11460,7 @@
           <a:bodyPr wrap="square" lIns="0" tIns="0" rIns="0" bIns="0" rtlCol="0" anchor="ctr"/>
           <a:lstStyle/>
           <a:p>
-            <a:pPr indent="0" marL="0">
+            <a:pPr marL="0" indent="0">
               <a:buNone/>
             </a:pPr>
             <a:r>
@@ -11267,7 +11499,7 @@
           <a:bodyPr wrap="square" lIns="0" tIns="0" rIns="0" bIns="0" rtlCol="0" anchor="ctr"/>
           <a:lstStyle/>
           <a:p>
-            <a:pPr indent="0" marL="0">
+            <a:pPr marL="0" indent="0">
               <a:buNone/>
             </a:pPr>
             <a:r>
@@ -11306,7 +11538,7 @@
           <a:bodyPr wrap="square" lIns="0" tIns="0" rIns="0" bIns="0" rtlCol="0" anchor="ctr"/>
           <a:lstStyle/>
           <a:p>
-            <a:pPr indent="0" marL="0">
+            <a:pPr marL="0" indent="0">
               <a:buNone/>
             </a:pPr>
             <a:r>
@@ -11348,13 +11580,20 @@
             <a:prstDash val="solid"/>
           </a:ln>
           <a:effectLst>
-            <a:outerShdw sx="100000" sy="100000" kx="0" ky="0" algn="bl" rotWithShape="0" blurRad="101600" dist="38100" dir="8100000">
+            <a:outerShdw blurRad="101600" dist="38100" dir="8100000" algn="bl" rotWithShape="0">
               <a:srgbClr val="000000">
                 <a:alpha val="10000"/>
               </a:srgbClr>
             </a:outerShdw>
           </a:effectLst>
         </p:spPr>
+        <p:txBody>
+          <a:bodyPr/>
+          <a:lstStyle/>
+          <a:p>
+            <a:endParaRPr lang="en-US"/>
+          </a:p>
+        </p:txBody>
       </p:sp>
       <p:sp>
         <p:nvSpPr>
@@ -11380,6 +11619,13 @@
             <a:prstDash val="solid"/>
           </a:ln>
         </p:spPr>
+        <p:txBody>
+          <a:bodyPr/>
+          <a:lstStyle/>
+          <a:p>
+            <a:endParaRPr lang="en-US"/>
+          </a:p>
+        </p:txBody>
       </p:sp>
       <p:sp>
         <p:nvSpPr>
@@ -11402,7 +11648,7 @@
           <a:bodyPr wrap="square" lIns="0" tIns="0" rIns="0" bIns="0" rtlCol="0" anchor="ctr"/>
           <a:lstStyle/>
           <a:p>
-            <a:pPr indent="0" marL="0">
+            <a:pPr marL="0" indent="0">
               <a:buNone/>
             </a:pPr>
             <a:r>
@@ -11441,7 +11687,7 @@
           <a:bodyPr wrap="square" lIns="0" tIns="0" rIns="0" bIns="0" rtlCol="0" anchor="ctr"/>
           <a:lstStyle/>
           <a:p>
-            <a:pPr indent="0" marL="0">
+            <a:pPr marL="0" indent="0">
               <a:buNone/>
             </a:pPr>
             <a:r>
@@ -11480,7 +11726,7 @@
           <a:bodyPr wrap="square" lIns="0" tIns="0" rIns="0" bIns="0" rtlCol="0" anchor="ctr"/>
           <a:lstStyle/>
           <a:p>
-            <a:pPr indent="0" marL="0">
+            <a:pPr marL="0" indent="0">
               <a:buNone/>
             </a:pPr>
             <a:r>
@@ -11522,13 +11768,20 @@
             <a:prstDash val="solid"/>
           </a:ln>
           <a:effectLst>
-            <a:outerShdw sx="100000" sy="100000" kx="0" ky="0" algn="bl" rotWithShape="0" blurRad="101600" dist="38100" dir="8100000">
+            <a:outerShdw blurRad="101600" dist="38100" dir="8100000" algn="bl" rotWithShape="0">
               <a:srgbClr val="000000">
                 <a:alpha val="10000"/>
               </a:srgbClr>
             </a:outerShdw>
           </a:effectLst>
         </p:spPr>
+        <p:txBody>
+          <a:bodyPr/>
+          <a:lstStyle/>
+          <a:p>
+            <a:endParaRPr lang="en-US"/>
+          </a:p>
+        </p:txBody>
       </p:sp>
       <p:sp>
         <p:nvSpPr>
@@ -11554,6 +11807,13 @@
             <a:prstDash val="solid"/>
           </a:ln>
         </p:spPr>
+        <p:txBody>
+          <a:bodyPr/>
+          <a:lstStyle/>
+          <a:p>
+            <a:endParaRPr lang="en-US"/>
+          </a:p>
+        </p:txBody>
       </p:sp>
       <p:sp>
         <p:nvSpPr>
@@ -11576,7 +11836,7 @@
           <a:bodyPr wrap="square" lIns="0" tIns="0" rIns="0" bIns="0" rtlCol="0" anchor="ctr"/>
           <a:lstStyle/>
           <a:p>
-            <a:pPr indent="0" marL="0">
+            <a:pPr marL="0" indent="0">
               <a:buNone/>
             </a:pPr>
             <a:r>
@@ -11615,7 +11875,7 @@
           <a:bodyPr wrap="square" lIns="0" tIns="0" rIns="0" bIns="0" rtlCol="0" anchor="ctr"/>
           <a:lstStyle/>
           <a:p>
-            <a:pPr indent="0" marL="0">
+            <a:pPr marL="0" indent="0">
               <a:buNone/>
             </a:pPr>
             <a:r>
@@ -11654,7 +11914,7 @@
           <a:bodyPr wrap="square" lIns="0" tIns="0" rIns="0" bIns="0" rtlCol="0" anchor="ctr"/>
           <a:lstStyle/>
           <a:p>
-            <a:pPr indent="0" marL="0">
+            <a:pPr marL="0" indent="0">
               <a:buNone/>
             </a:pPr>
             <a:r>
@@ -11688,6 +11948,7 @@
         <a:solidFill>
           <a:srgbClr val="1C2B4A"/>
         </a:solidFill>
+        <a:effectLst/>
       </p:bgPr>
     </p:bg>
     <p:spTree>
@@ -11728,6 +11989,13 @@
             <a:prstDash val="solid"/>
           </a:ln>
         </p:spPr>
+        <p:txBody>
+          <a:bodyPr/>
+          <a:lstStyle/>
+          <a:p>
+            <a:endParaRPr lang="en-US"/>
+          </a:p>
+        </p:txBody>
       </p:sp>
       <p:sp>
         <p:nvSpPr>
@@ -11750,7 +12018,7 @@
           <a:bodyPr wrap="square" rtlCol="0" anchor="ctr"/>
           <a:lstStyle/>
           <a:p>
-            <a:pPr algn="ctr" indent="0" marL="0">
+            <a:pPr marL="0" indent="0" algn="ctr">
               <a:buNone/>
             </a:pPr>
             <a:r>
@@ -11786,7 +12054,7 @@
           <a:bodyPr wrap="square" lIns="0" tIns="0" rIns="0" bIns="0" rtlCol="0" anchor="ctr"/>
           <a:lstStyle/>
           <a:p>
-            <a:pPr algn="ctr" indent="0" marL="0">
+            <a:pPr marL="0" indent="0" algn="ctr">
               <a:buNone/>
             </a:pPr>
             <a:r>
@@ -11825,7 +12093,7 @@
           <a:bodyPr wrap="square" lIns="0" tIns="0" rIns="0" bIns="0" rtlCol="0" anchor="ctr"/>
           <a:lstStyle/>
           <a:p>
-            <a:pPr algn="ctr" indent="0" marL="0">
+            <a:pPr marL="0" indent="0" algn="ctr">
               <a:buNone/>
             </a:pPr>
             <a:r>
@@ -11867,6 +12135,13 @@
             <a:prstDash val="solid"/>
           </a:ln>
         </p:spPr>
+        <p:txBody>
+          <a:bodyPr/>
+          <a:lstStyle/>
+          <a:p>
+            <a:endParaRPr lang="en-US"/>
+          </a:p>
+        </p:txBody>
       </p:sp>
       <p:sp>
         <p:nvSpPr>
@@ -11889,7 +12164,7 @@
           <a:bodyPr wrap="square" lIns="0" tIns="0" rIns="0" bIns="0" rtlCol="0" anchor="ctr"/>
           <a:lstStyle/>
           <a:p>
-            <a:pPr algn="ctr" indent="0" marL="0">
+            <a:pPr marL="0" indent="0" algn="ctr">
               <a:buNone/>
             </a:pPr>
             <a:r>
@@ -11923,6 +12198,7 @@
         <a:solidFill>
           <a:srgbClr val="FFFFFF"/>
         </a:solidFill>
+        <a:effectLst/>
       </p:bgPr>
     </p:bg>
     <p:spTree>
@@ -11960,7 +12236,7 @@
           <a:bodyPr wrap="square" lIns="0" tIns="0" rIns="0" bIns="0" rtlCol="0" anchor="ctr"/>
           <a:lstStyle/>
           <a:p>
-            <a:pPr indent="0" marL="0">
+            <a:pPr marL="0" indent="0">
               <a:buNone/>
             </a:pPr>
             <a:r>
@@ -12002,6 +12278,13 @@
             <a:prstDash val="solid"/>
           </a:ln>
         </p:spPr>
+        <p:txBody>
+          <a:bodyPr/>
+          <a:lstStyle/>
+          <a:p>
+            <a:endParaRPr lang="en-US"/>
+          </a:p>
+        </p:txBody>
       </p:sp>
       <p:sp>
         <p:nvSpPr>
@@ -12027,13 +12310,20 @@
             <a:prstDash val="solid"/>
           </a:ln>
           <a:effectLst>
-            <a:outerShdw sx="100000" sy="100000" kx="0" ky="0" algn="bl" rotWithShape="0" blurRad="101600" dist="38100" dir="8100000">
+            <a:outerShdw blurRad="101600" dist="38100" dir="8100000" algn="bl" rotWithShape="0">
               <a:srgbClr val="000000">
                 <a:alpha val="10000"/>
               </a:srgbClr>
             </a:outerShdw>
           </a:effectLst>
         </p:spPr>
+        <p:txBody>
+          <a:bodyPr/>
+          <a:lstStyle/>
+          <a:p>
+            <a:endParaRPr lang="en-US"/>
+          </a:p>
+        </p:txBody>
       </p:sp>
       <p:sp>
         <p:nvSpPr>
@@ -12056,7 +12346,7 @@
           <a:bodyPr wrap="square" lIns="0" tIns="0" rIns="0" bIns="0" rtlCol="0" anchor="ctr"/>
           <a:lstStyle/>
           <a:p>
-            <a:pPr indent="0" marL="0">
+            <a:pPr marL="0" indent="0">
               <a:buNone/>
             </a:pPr>
             <a:r>
@@ -12095,7 +12385,7 @@
           <a:bodyPr wrap="square" lIns="0" tIns="0" rIns="0" bIns="0" rtlCol="0" anchor="t"/>
           <a:lstStyle/>
           <a:p>
-            <a:pPr indent="0" marL="0">
+            <a:pPr marL="0" indent="0">
               <a:buNone/>
             </a:pPr>
             <a:r>
@@ -12112,13 +12402,13 @@
             <a:endParaRPr lang="en-US" sz="1200" dirty="0"/>
           </a:p>
           <a:p>
-            <a:pPr indent="0" marL="0">
+            <a:pPr marL="0" indent="0">
               <a:buNone/>
             </a:pPr>
             <a:endParaRPr lang="en-US" sz="1200" dirty="0"/>
           </a:p>
           <a:p>
-            <a:pPr indent="0" marL="0">
+            <a:pPr marL="0" indent="0">
               <a:buNone/>
             </a:pPr>
             <a:r>
@@ -12135,13 +12425,13 @@
             <a:endParaRPr lang="en-US" sz="1200" dirty="0"/>
           </a:p>
           <a:p>
-            <a:pPr indent="0" marL="0">
+            <a:pPr marL="0" indent="0">
               <a:buNone/>
             </a:pPr>
             <a:endParaRPr lang="en-US" sz="1200" dirty="0"/>
           </a:p>
           <a:p>
-            <a:pPr indent="0" marL="0">
+            <a:pPr marL="0" indent="0">
               <a:buNone/>
             </a:pPr>
             <a:r>
@@ -12158,7 +12448,7 @@
             <a:endParaRPr lang="en-US" sz="1200" dirty="0"/>
           </a:p>
           <a:p>
-            <a:pPr indent="0" marL="0">
+            <a:pPr marL="0" indent="0">
               <a:buNone/>
             </a:pPr>
             <a:r>
@@ -12175,7 +12465,7 @@
             <a:endParaRPr lang="en-US" sz="1200" dirty="0"/>
           </a:p>
           <a:p>
-            <a:pPr indent="0" marL="0">
+            <a:pPr marL="0" indent="0">
               <a:buNone/>
             </a:pPr>
             <a:r>
@@ -12217,13 +12507,20 @@
             <a:prstDash val="solid"/>
           </a:ln>
           <a:effectLst>
-            <a:outerShdw sx="100000" sy="100000" kx="0" ky="0" algn="bl" rotWithShape="0" blurRad="101600" dist="38100" dir="8100000">
+            <a:outerShdw blurRad="101600" dist="38100" dir="8100000" algn="bl" rotWithShape="0">
               <a:srgbClr val="000000">
                 <a:alpha val="10000"/>
               </a:srgbClr>
             </a:outerShdw>
           </a:effectLst>
         </p:spPr>
+        <p:txBody>
+          <a:bodyPr/>
+          <a:lstStyle/>
+          <a:p>
+            <a:endParaRPr lang="en-US"/>
+          </a:p>
+        </p:txBody>
       </p:sp>
       <p:sp>
         <p:nvSpPr>
@@ -12246,7 +12543,7 @@
           <a:bodyPr wrap="square" lIns="0" tIns="0" rIns="0" bIns="0" rtlCol="0" anchor="ctr"/>
           <a:lstStyle/>
           <a:p>
-            <a:pPr indent="0" marL="0">
+            <a:pPr marL="0" indent="0">
               <a:buNone/>
             </a:pPr>
             <a:r>
@@ -12288,6 +12585,13 @@
             <a:prstDash val="solid"/>
           </a:ln>
         </p:spPr>
+        <p:txBody>
+          <a:bodyPr/>
+          <a:lstStyle/>
+          <a:p>
+            <a:endParaRPr lang="en-US"/>
+          </a:p>
+        </p:txBody>
       </p:sp>
       <p:sp>
         <p:nvSpPr>
@@ -12310,7 +12614,7 @@
           <a:bodyPr wrap="square" lIns="0" tIns="0" rIns="0" bIns="0" rtlCol="0" anchor="ctr"/>
           <a:lstStyle/>
           <a:p>
-            <a:pPr indent="0" marL="0">
+            <a:pPr marL="0" indent="0">
               <a:buNone/>
             </a:pPr>
             <a:r>
@@ -12349,7 +12653,7 @@
           <a:bodyPr wrap="square" lIns="0" tIns="0" rIns="0" bIns="0" rtlCol="0" anchor="ctr"/>
           <a:lstStyle/>
           <a:p>
-            <a:pPr indent="0" marL="0">
+            <a:pPr marL="0" indent="0">
               <a:buNone/>
             </a:pPr>
             <a:r>
@@ -12388,7 +12692,7 @@
           <a:bodyPr wrap="square" lIns="0" tIns="0" rIns="0" bIns="0" rtlCol="0" anchor="ctr"/>
           <a:lstStyle/>
           <a:p>
-            <a:pPr indent="0" marL="0">
+            <a:pPr marL="0" indent="0">
               <a:buNone/>
             </a:pPr>
             <a:r>
@@ -12430,6 +12734,13 @@
             <a:prstDash val="solid"/>
           </a:ln>
         </p:spPr>
+        <p:txBody>
+          <a:bodyPr/>
+          <a:lstStyle/>
+          <a:p>
+            <a:endParaRPr lang="en-US"/>
+          </a:p>
+        </p:txBody>
       </p:sp>
       <p:sp>
         <p:nvSpPr>
@@ -12452,7 +12763,7 @@
           <a:bodyPr wrap="square" lIns="0" tIns="0" rIns="0" bIns="0" rtlCol="0" anchor="ctr"/>
           <a:lstStyle/>
           <a:p>
-            <a:pPr indent="0" marL="0">
+            <a:pPr marL="0" indent="0">
               <a:buNone/>
             </a:pPr>
             <a:r>
@@ -12491,7 +12802,7 @@
           <a:bodyPr wrap="square" lIns="0" tIns="0" rIns="0" bIns="0" rtlCol="0" anchor="ctr"/>
           <a:lstStyle/>
           <a:p>
-            <a:pPr indent="0" marL="0">
+            <a:pPr marL="0" indent="0">
               <a:buNone/>
             </a:pPr>
             <a:r>
@@ -12530,7 +12841,7 @@
           <a:bodyPr wrap="square" lIns="0" tIns="0" rIns="0" bIns="0" rtlCol="0" anchor="ctr"/>
           <a:lstStyle/>
           <a:p>
-            <a:pPr indent="0" marL="0">
+            <a:pPr marL="0" indent="0">
               <a:buNone/>
             </a:pPr>
             <a:r>
@@ -12572,6 +12883,13 @@
             <a:prstDash val="solid"/>
           </a:ln>
         </p:spPr>
+        <p:txBody>
+          <a:bodyPr/>
+          <a:lstStyle/>
+          <a:p>
+            <a:endParaRPr lang="en-US"/>
+          </a:p>
+        </p:txBody>
       </p:sp>
       <p:sp>
         <p:nvSpPr>
@@ -12594,7 +12912,7 @@
           <a:bodyPr wrap="square" lIns="0" tIns="0" rIns="0" bIns="0" rtlCol="0" anchor="ctr"/>
           <a:lstStyle/>
           <a:p>
-            <a:pPr indent="0" marL="0">
+            <a:pPr marL="0" indent="0">
               <a:buNone/>
             </a:pPr>
             <a:r>
@@ -12633,7 +12951,7 @@
           <a:bodyPr wrap="square" lIns="0" tIns="0" rIns="0" bIns="0" rtlCol="0" anchor="ctr"/>
           <a:lstStyle/>
           <a:p>
-            <a:pPr indent="0" marL="0">
+            <a:pPr marL="0" indent="0">
               <a:buNone/>
             </a:pPr>
             <a:r>
@@ -12672,7 +12990,7 @@
           <a:bodyPr wrap="square" lIns="0" tIns="0" rIns="0" bIns="0" rtlCol="0" anchor="ctr"/>
           <a:lstStyle/>
           <a:p>
-            <a:pPr indent="0" marL="0">
+            <a:pPr marL="0" indent="0">
               <a:buNone/>
             </a:pPr>
             <a:r>
@@ -12706,6 +13024,7 @@
         <a:solidFill>
           <a:srgbClr val="FFFFFF"/>
         </a:solidFill>
+        <a:effectLst/>
       </p:bgPr>
     </p:bg>
     <p:spTree>
@@ -12743,7 +13062,7 @@
           <a:bodyPr wrap="square" lIns="0" tIns="0" rIns="0" bIns="0" rtlCol="0" anchor="ctr"/>
           <a:lstStyle/>
           <a:p>
-            <a:pPr indent="0" marL="0">
+            <a:pPr marL="0" indent="0">
               <a:buNone/>
             </a:pPr>
             <a:r>
@@ -12785,6 +13104,13 @@
             <a:prstDash val="solid"/>
           </a:ln>
         </p:spPr>
+        <p:txBody>
+          <a:bodyPr/>
+          <a:lstStyle/>
+          <a:p>
+            <a:endParaRPr lang="en-US"/>
+          </a:p>
+        </p:txBody>
       </p:sp>
       <p:sp>
         <p:nvSpPr>
@@ -12810,13 +13136,20 @@
             <a:prstDash val="solid"/>
           </a:ln>
           <a:effectLst>
-            <a:outerShdw sx="100000" sy="100000" kx="0" ky="0" algn="bl" rotWithShape="0" blurRad="101600" dist="38100" dir="8100000">
+            <a:outerShdw blurRad="101600" dist="38100" dir="8100000" algn="bl" rotWithShape="0">
               <a:srgbClr val="000000">
                 <a:alpha val="10000"/>
               </a:srgbClr>
             </a:outerShdw>
           </a:effectLst>
         </p:spPr>
+        <p:txBody>
+          <a:bodyPr/>
+          <a:lstStyle/>
+          <a:p>
+            <a:endParaRPr lang="en-US"/>
+          </a:p>
+        </p:txBody>
       </p:sp>
       <p:sp>
         <p:nvSpPr>
@@ -12842,6 +13175,13 @@
             <a:prstDash val="solid"/>
           </a:ln>
         </p:spPr>
+        <p:txBody>
+          <a:bodyPr/>
+          <a:lstStyle/>
+          <a:p>
+            <a:endParaRPr lang="en-US"/>
+          </a:p>
+        </p:txBody>
       </p:sp>
       <p:sp>
         <p:nvSpPr>
@@ -12864,7 +13204,7 @@
           <a:bodyPr wrap="square" rtlCol="0" anchor="ctr"/>
           <a:lstStyle/>
           <a:p>
-            <a:pPr algn="ctr" indent="0" marL="0">
+            <a:pPr marL="0" indent="0" algn="ctr">
               <a:buNone/>
             </a:pPr>
             <a:r>
@@ -12900,7 +13240,7 @@
           <a:bodyPr wrap="square" lIns="0" tIns="0" rIns="0" bIns="0" rtlCol="0" anchor="ctr"/>
           <a:lstStyle/>
           <a:p>
-            <a:pPr indent="0" marL="0">
+            <a:pPr marL="0" indent="0">
               <a:buNone/>
             </a:pPr>
             <a:r>
@@ -12939,7 +13279,7 @@
           <a:bodyPr wrap="square" lIns="0" tIns="0" rIns="0" bIns="0" rtlCol="0" anchor="ctr"/>
           <a:lstStyle/>
           <a:p>
-            <a:pPr indent="0" marL="0">
+            <a:pPr marL="0" indent="0">
               <a:buNone/>
             </a:pPr>
             <a:r>
@@ -12978,7 +13318,7 @@
           <a:bodyPr wrap="square" lIns="0" tIns="0" rIns="0" bIns="0" rtlCol="0" anchor="ctr"/>
           <a:lstStyle/>
           <a:p>
-            <a:pPr indent="0" marL="0">
+            <a:pPr marL="0" indent="0">
               <a:buNone/>
             </a:pPr>
             <a:r>
@@ -13017,7 +13357,7 @@
           <a:bodyPr wrap="square" lIns="0" tIns="0" rIns="0" bIns="0" rtlCol="0" anchor="ctr"/>
           <a:lstStyle/>
           <a:p>
-            <a:pPr indent="0" marL="0">
+            <a:pPr marL="0" indent="0">
               <a:buNone/>
             </a:pPr>
             <a:r>
@@ -13056,7 +13396,7 @@
           <a:bodyPr wrap="square" lIns="0" tIns="0" rIns="0" bIns="0" rtlCol="0" anchor="ctr"/>
           <a:lstStyle/>
           <a:p>
-            <a:pPr indent="0" marL="0">
+            <a:pPr marL="0" indent="0">
               <a:buNone/>
             </a:pPr>
             <a:r>
@@ -13095,7 +13435,7 @@
           <a:bodyPr wrap="square" lIns="0" tIns="0" rIns="0" bIns="0" rtlCol="0" anchor="ctr"/>
           <a:lstStyle/>
           <a:p>
-            <a:pPr indent="0" marL="0">
+            <a:pPr marL="0" indent="0">
               <a:buNone/>
             </a:pPr>
             <a:r>
@@ -13134,7 +13474,7 @@
           <a:bodyPr wrap="square" lIns="0" tIns="0" rIns="0" bIns="0" rtlCol="0" anchor="ctr"/>
           <a:lstStyle/>
           <a:p>
-            <a:pPr indent="0" marL="0">
+            <a:pPr marL="0" indent="0">
               <a:buNone/>
             </a:pPr>
             <a:r>
@@ -13173,7 +13513,7 @@
           <a:bodyPr wrap="square" lIns="0" tIns="0" rIns="0" bIns="0" rtlCol="0" anchor="ctr"/>
           <a:lstStyle/>
           <a:p>
-            <a:pPr indent="0" marL="0">
+            <a:pPr marL="0" indent="0">
               <a:buNone/>
             </a:pPr>
             <a:r>
@@ -13212,7 +13552,7 @@
           <a:bodyPr wrap="square" lIns="0" tIns="0" rIns="0" bIns="0" rtlCol="0" anchor="ctr"/>
           <a:lstStyle/>
           <a:p>
-            <a:pPr indent="0" marL="0">
+            <a:pPr marL="0" indent="0">
               <a:buNone/>
             </a:pPr>
             <a:r>
@@ -13251,7 +13591,7 @@
           <a:bodyPr wrap="square" lIns="0" tIns="0" rIns="0" bIns="0" rtlCol="0" anchor="ctr"/>
           <a:lstStyle/>
           <a:p>
-            <a:pPr indent="0" marL="0">
+            <a:pPr marL="0" indent="0">
               <a:buNone/>
             </a:pPr>
             <a:r>
@@ -13290,7 +13630,7 @@
           <a:bodyPr wrap="square" lIns="0" tIns="0" rIns="0" bIns="0" rtlCol="0" anchor="ctr"/>
           <a:lstStyle/>
           <a:p>
-            <a:pPr indent="0" marL="0">
+            <a:pPr marL="0" indent="0">
               <a:buNone/>
             </a:pPr>
             <a:r>
@@ -13329,7 +13669,7 @@
           <a:bodyPr wrap="square" lIns="0" tIns="0" rIns="0" bIns="0" rtlCol="0" anchor="ctr"/>
           <a:lstStyle/>
           <a:p>
-            <a:pPr indent="0" marL="0">
+            <a:pPr marL="0" indent="0">
               <a:buNone/>
             </a:pPr>
             <a:r>
@@ -13368,7 +13708,7 @@
           <a:bodyPr wrap="square" lIns="0" tIns="0" rIns="0" bIns="0" rtlCol="0" anchor="ctr"/>
           <a:lstStyle/>
           <a:p>
-            <a:pPr indent="0" marL="0">
+            <a:pPr marL="0" indent="0">
               <a:buNone/>
             </a:pPr>
             <a:r>
@@ -13407,7 +13747,7 @@
           <a:bodyPr wrap="square" lIns="0" tIns="0" rIns="0" bIns="0" rtlCol="0" anchor="ctr"/>
           <a:lstStyle/>
           <a:p>
-            <a:pPr indent="0" marL="0">
+            <a:pPr marL="0" indent="0">
               <a:buNone/>
             </a:pPr>
             <a:r>
@@ -13449,13 +13789,20 @@
             <a:prstDash val="solid"/>
           </a:ln>
           <a:effectLst>
-            <a:outerShdw sx="100000" sy="100000" kx="0" ky="0" algn="bl" rotWithShape="0" blurRad="101600" dist="38100" dir="8100000">
+            <a:outerShdw blurRad="101600" dist="38100" dir="8100000" algn="bl" rotWithShape="0">
               <a:srgbClr val="000000">
                 <a:alpha val="10000"/>
               </a:srgbClr>
             </a:outerShdw>
           </a:effectLst>
         </p:spPr>
+        <p:txBody>
+          <a:bodyPr/>
+          <a:lstStyle/>
+          <a:p>
+            <a:endParaRPr lang="en-US"/>
+          </a:p>
+        </p:txBody>
       </p:sp>
       <p:sp>
         <p:nvSpPr>
@@ -13481,6 +13828,13 @@
             <a:prstDash val="solid"/>
           </a:ln>
         </p:spPr>
+        <p:txBody>
+          <a:bodyPr/>
+          <a:lstStyle/>
+          <a:p>
+            <a:endParaRPr lang="en-US"/>
+          </a:p>
+        </p:txBody>
       </p:sp>
       <p:sp>
         <p:nvSpPr>
@@ -13503,7 +13857,7 @@
           <a:bodyPr wrap="square" rtlCol="0" anchor="ctr"/>
           <a:lstStyle/>
           <a:p>
-            <a:pPr algn="ctr" indent="0" marL="0">
+            <a:pPr marL="0" indent="0" algn="ctr">
               <a:buNone/>
             </a:pPr>
             <a:r>
@@ -13539,7 +13893,7 @@
           <a:bodyPr wrap="square" lIns="0" tIns="0" rIns="0" bIns="0" rtlCol="0" anchor="ctr"/>
           <a:lstStyle/>
           <a:p>
-            <a:pPr indent="0" marL="0">
+            <a:pPr marL="0" indent="0">
               <a:buNone/>
             </a:pPr>
             <a:r>
@@ -13578,7 +13932,7 @@
           <a:bodyPr wrap="square" lIns="0" tIns="0" rIns="0" bIns="0" rtlCol="0" anchor="ctr"/>
           <a:lstStyle/>
           <a:p>
-            <a:pPr indent="0" marL="0">
+            <a:pPr marL="0" indent="0">
               <a:buNone/>
             </a:pPr>
             <a:r>
@@ -13617,7 +13971,7 @@
           <a:bodyPr wrap="square" lIns="0" tIns="0" rIns="0" bIns="0" rtlCol="0" anchor="ctr"/>
           <a:lstStyle/>
           <a:p>
-            <a:pPr indent="0" marL="0">
+            <a:pPr marL="0" indent="0">
               <a:buNone/>
             </a:pPr>
             <a:r>
@@ -13656,7 +14010,7 @@
           <a:bodyPr wrap="square" lIns="0" tIns="0" rIns="0" bIns="0" rtlCol="0" anchor="ctr"/>
           <a:lstStyle/>
           <a:p>
-            <a:pPr indent="0" marL="0">
+            <a:pPr marL="0" indent="0">
               <a:buNone/>
             </a:pPr>
             <a:r>
@@ -13695,7 +14049,7 @@
           <a:bodyPr wrap="square" lIns="0" tIns="0" rIns="0" bIns="0" rtlCol="0" anchor="ctr"/>
           <a:lstStyle/>
           <a:p>
-            <a:pPr indent="0" marL="0">
+            <a:pPr marL="0" indent="0">
               <a:buNone/>
             </a:pPr>
             <a:r>
@@ -13734,7 +14088,7 @@
           <a:bodyPr wrap="square" lIns="0" tIns="0" rIns="0" bIns="0" rtlCol="0" anchor="ctr"/>
           <a:lstStyle/>
           <a:p>
-            <a:pPr indent="0" marL="0">
+            <a:pPr marL="0" indent="0">
               <a:buNone/>
             </a:pPr>
             <a:r>
@@ -13773,7 +14127,7 @@
           <a:bodyPr wrap="square" lIns="0" tIns="0" rIns="0" bIns="0" rtlCol="0" anchor="ctr"/>
           <a:lstStyle/>
           <a:p>
-            <a:pPr indent="0" marL="0">
+            <a:pPr marL="0" indent="0">
               <a:buNone/>
             </a:pPr>
             <a:r>
@@ -13812,7 +14166,7 @@
           <a:bodyPr wrap="square" lIns="0" tIns="0" rIns="0" bIns="0" rtlCol="0" anchor="ctr"/>
           <a:lstStyle/>
           <a:p>
-            <a:pPr indent="0" marL="0">
+            <a:pPr marL="0" indent="0">
               <a:buNone/>
             </a:pPr>
             <a:r>
@@ -13851,7 +14205,7 @@
           <a:bodyPr wrap="square" lIns="0" tIns="0" rIns="0" bIns="0" rtlCol="0" anchor="ctr"/>
           <a:lstStyle/>
           <a:p>
-            <a:pPr indent="0" marL="0">
+            <a:pPr marL="0" indent="0">
               <a:buNone/>
             </a:pPr>
             <a:r>
@@ -13890,7 +14244,7 @@
           <a:bodyPr wrap="square" lIns="0" tIns="0" rIns="0" bIns="0" rtlCol="0" anchor="ctr"/>
           <a:lstStyle/>
           <a:p>
-            <a:pPr indent="0" marL="0">
+            <a:pPr marL="0" indent="0">
               <a:buNone/>
             </a:pPr>
             <a:r>
@@ -13929,7 +14283,7 @@
           <a:bodyPr wrap="square" lIns="0" tIns="0" rIns="0" bIns="0" rtlCol="0" anchor="ctr"/>
           <a:lstStyle/>
           <a:p>
-            <a:pPr indent="0" marL="0">
+            <a:pPr marL="0" indent="0">
               <a:buNone/>
             </a:pPr>
             <a:r>
@@ -13968,7 +14322,7 @@
           <a:bodyPr wrap="square" lIns="0" tIns="0" rIns="0" bIns="0" rtlCol="0" anchor="ctr"/>
           <a:lstStyle/>
           <a:p>
-            <a:pPr indent="0" marL="0">
+            <a:pPr marL="0" indent="0">
               <a:buNone/>
             </a:pPr>
             <a:r>
@@ -14007,7 +14361,7 @@
           <a:bodyPr wrap="square" lIns="0" tIns="0" rIns="0" bIns="0" rtlCol="0" anchor="ctr"/>
           <a:lstStyle/>
           <a:p>
-            <a:pPr indent="0" marL="0">
+            <a:pPr marL="0" indent="0">
               <a:buNone/>
             </a:pPr>
             <a:r>
@@ -14046,7 +14400,7 @@
           <a:bodyPr wrap="square" lIns="0" tIns="0" rIns="0" bIns="0" rtlCol="0" anchor="ctr"/>
           <a:lstStyle/>
           <a:p>
-            <a:pPr indent="0" marL="0">
+            <a:pPr marL="0" indent="0">
               <a:buNone/>
             </a:pPr>
             <a:r>
@@ -14080,6 +14434,7 @@
         <a:solidFill>
           <a:srgbClr val="FFFFFF"/>
         </a:solidFill>
+        <a:effectLst/>
       </p:bgPr>
     </p:bg>
     <p:spTree>
@@ -14117,7 +14472,7 @@
           <a:bodyPr wrap="square" lIns="0" tIns="0" rIns="0" bIns="0" rtlCol="0" anchor="ctr"/>
           <a:lstStyle/>
           <a:p>
-            <a:pPr indent="0" marL="0">
+            <a:pPr marL="0" indent="0">
               <a:buNone/>
             </a:pPr>
             <a:r>
@@ -14159,6 +14514,13 @@
             <a:prstDash val="solid"/>
           </a:ln>
         </p:spPr>
+        <p:txBody>
+          <a:bodyPr/>
+          <a:lstStyle/>
+          <a:p>
+            <a:endParaRPr lang="en-US"/>
+          </a:p>
+        </p:txBody>
       </p:sp>
       <p:sp>
         <p:nvSpPr>
@@ -14184,6 +14546,13 @@
             <a:prstDash val="solid"/>
           </a:ln>
         </p:spPr>
+        <p:txBody>
+          <a:bodyPr/>
+          <a:lstStyle/>
+          <a:p>
+            <a:endParaRPr lang="en-US"/>
+          </a:p>
+        </p:txBody>
       </p:sp>
       <p:sp>
         <p:nvSpPr>
@@ -14206,7 +14575,7 @@
           <a:bodyPr wrap="square" rtlCol="0" anchor="ctr"/>
           <a:lstStyle/>
           <a:p>
-            <a:pPr algn="ctr" indent="0" marL="0">
+            <a:pPr marL="0" indent="0" algn="ctr">
               <a:buNone/>
             </a:pPr>
             <a:r>
@@ -14242,7 +14611,7 @@
           <a:bodyPr wrap="square" lIns="0" tIns="0" rIns="0" bIns="0" rtlCol="0" anchor="ctr"/>
           <a:lstStyle/>
           <a:p>
-            <a:pPr indent="0" marL="0">
+            <a:pPr marL="0" indent="0">
               <a:buNone/>
             </a:pPr>
             <a:r>
@@ -14281,7 +14650,7 @@
           <a:bodyPr wrap="square" lIns="0" tIns="0" rIns="0" bIns="0" rtlCol="0" anchor="ctr"/>
           <a:lstStyle/>
           <a:p>
-            <a:pPr indent="0" marL="0">
+            <a:pPr marL="0" indent="0">
               <a:buNone/>
             </a:pPr>
             <a:r>
@@ -14323,6 +14692,13 @@
             <a:prstDash val="solid"/>
           </a:ln>
         </p:spPr>
+        <p:txBody>
+          <a:bodyPr/>
+          <a:lstStyle/>
+          <a:p>
+            <a:endParaRPr lang="en-US"/>
+          </a:p>
+        </p:txBody>
       </p:sp>
       <p:sp>
         <p:nvSpPr>
@@ -14345,7 +14721,7 @@
           <a:bodyPr wrap="square" rtlCol="0" anchor="ctr"/>
           <a:lstStyle/>
           <a:p>
-            <a:pPr algn="ctr" indent="0" marL="0">
+            <a:pPr marL="0" indent="0" algn="ctr">
               <a:buNone/>
             </a:pPr>
             <a:r>
@@ -14381,7 +14757,7 @@
           <a:bodyPr wrap="square" lIns="0" tIns="0" rIns="0" bIns="0" rtlCol="0" anchor="ctr"/>
           <a:lstStyle/>
           <a:p>
-            <a:pPr indent="0" marL="0">
+            <a:pPr marL="0" indent="0">
               <a:buNone/>
             </a:pPr>
             <a:r>
@@ -14420,7 +14796,7 @@
           <a:bodyPr wrap="square" lIns="0" tIns="0" rIns="0" bIns="0" rtlCol="0" anchor="ctr"/>
           <a:lstStyle/>
           <a:p>
-            <a:pPr indent="0" marL="0">
+            <a:pPr marL="0" indent="0">
               <a:buNone/>
             </a:pPr>
             <a:r>
@@ -14462,6 +14838,13 @@
             <a:prstDash val="solid"/>
           </a:ln>
         </p:spPr>
+        <p:txBody>
+          <a:bodyPr/>
+          <a:lstStyle/>
+          <a:p>
+            <a:endParaRPr lang="en-US"/>
+          </a:p>
+        </p:txBody>
       </p:sp>
       <p:sp>
         <p:nvSpPr>
@@ -14484,7 +14867,7 @@
           <a:bodyPr wrap="square" rtlCol="0" anchor="ctr"/>
           <a:lstStyle/>
           <a:p>
-            <a:pPr algn="ctr" indent="0" marL="0">
+            <a:pPr marL="0" indent="0" algn="ctr">
               <a:buNone/>
             </a:pPr>
             <a:r>
@@ -14520,7 +14903,7 @@
           <a:bodyPr wrap="square" lIns="0" tIns="0" rIns="0" bIns="0" rtlCol="0" anchor="ctr"/>
           <a:lstStyle/>
           <a:p>
-            <a:pPr indent="0" marL="0">
+            <a:pPr marL="0" indent="0">
               <a:buNone/>
             </a:pPr>
             <a:r>
@@ -14559,7 +14942,7 @@
           <a:bodyPr wrap="square" lIns="0" tIns="0" rIns="0" bIns="0" rtlCol="0" anchor="ctr"/>
           <a:lstStyle/>
           <a:p>
-            <a:pPr indent="0" marL="0">
+            <a:pPr marL="0" indent="0">
               <a:buNone/>
             </a:pPr>
             <a:r>
@@ -14601,6 +14984,13 @@
             <a:prstDash val="solid"/>
           </a:ln>
         </p:spPr>
+        <p:txBody>
+          <a:bodyPr/>
+          <a:lstStyle/>
+          <a:p>
+            <a:endParaRPr lang="en-US"/>
+          </a:p>
+        </p:txBody>
       </p:sp>
       <p:sp>
         <p:nvSpPr>
@@ -14623,7 +15013,7 @@
           <a:bodyPr wrap="square" rtlCol="0" anchor="ctr"/>
           <a:lstStyle/>
           <a:p>
-            <a:pPr algn="ctr" indent="0" marL="0">
+            <a:pPr marL="0" indent="0" algn="ctr">
               <a:buNone/>
             </a:pPr>
             <a:r>
@@ -14659,7 +15049,7 @@
           <a:bodyPr wrap="square" lIns="0" tIns="0" rIns="0" bIns="0" rtlCol="0" anchor="ctr"/>
           <a:lstStyle/>
           <a:p>
-            <a:pPr indent="0" marL="0">
+            <a:pPr marL="0" indent="0">
               <a:buNone/>
             </a:pPr>
             <a:r>
@@ -14698,7 +15088,7 @@
           <a:bodyPr wrap="square" lIns="0" tIns="0" rIns="0" bIns="0" rtlCol="0" anchor="ctr"/>
           <a:lstStyle/>
           <a:p>
-            <a:pPr indent="0" marL="0">
+            <a:pPr marL="0" indent="0">
               <a:buNone/>
             </a:pPr>
             <a:r>
@@ -14740,6 +15130,13 @@
             <a:prstDash val="solid"/>
           </a:ln>
         </p:spPr>
+        <p:txBody>
+          <a:bodyPr/>
+          <a:lstStyle/>
+          <a:p>
+            <a:endParaRPr lang="en-US"/>
+          </a:p>
+        </p:txBody>
       </p:sp>
       <p:sp>
         <p:nvSpPr>
@@ -14762,7 +15159,7 @@
           <a:bodyPr wrap="square" rtlCol="0" anchor="ctr"/>
           <a:lstStyle/>
           <a:p>
-            <a:pPr algn="ctr" indent="0" marL="0">
+            <a:pPr marL="0" indent="0" algn="ctr">
               <a:buNone/>
             </a:pPr>
             <a:r>
@@ -14798,7 +15195,7 @@
           <a:bodyPr wrap="square" lIns="0" tIns="0" rIns="0" bIns="0" rtlCol="0" anchor="ctr"/>
           <a:lstStyle/>
           <a:p>
-            <a:pPr indent="0" marL="0">
+            <a:pPr marL="0" indent="0">
               <a:buNone/>
             </a:pPr>
             <a:r>
@@ -14837,7 +15234,7 @@
           <a:bodyPr wrap="square" lIns="0" tIns="0" rIns="0" bIns="0" rtlCol="0" anchor="ctr"/>
           <a:lstStyle/>
           <a:p>
-            <a:pPr indent="0" marL="0">
+            <a:pPr marL="0" indent="0">
               <a:buNone/>
             </a:pPr>
             <a:r>
@@ -14871,6 +15268,7 @@
         <a:solidFill>
           <a:srgbClr val="FFFFFF"/>
         </a:solidFill>
+        <a:effectLst/>
       </p:bgPr>
     </p:bg>
     <p:spTree>
@@ -14908,7 +15306,7 @@
           <a:bodyPr wrap="square" lIns="0" tIns="0" rIns="0" bIns="0" rtlCol="0" anchor="ctr"/>
           <a:lstStyle/>
           <a:p>
-            <a:pPr indent="0" marL="0">
+            <a:pPr marL="0" indent="0">
               <a:buNone/>
             </a:pPr>
             <a:r>
@@ -14950,17 +15348,24 @@
             <a:prstDash val="solid"/>
           </a:ln>
         </p:spPr>
+        <p:txBody>
+          <a:bodyPr/>
+          <a:lstStyle/>
+          <a:p>
+            <a:endParaRPr lang="en-US"/>
+          </a:p>
+        </p:txBody>
       </p:sp>
       <p:pic>
         <p:nvPicPr>
-          <p:cNvPr id="4" name="Image 0" descr="/sessions/vibrant-quirky-carson/mnt/Crypto-vs-Traditional-Markets/fig1_price_history.png">    </p:cNvPr>
+          <p:cNvPr id="4" name="Image 0" descr="/sessions/vibrant-quirky-carson/mnt/Crypto-vs-Traditional-Markets/fig1_price_history.png"/>
           <p:cNvPicPr>
             <a:picLocks noChangeAspect="1"/>
           </p:cNvPicPr>
           <p:nvPr/>
         </p:nvPicPr>
         <p:blipFill>
-          <a:blip r:embed="rId1"/>
+          <a:blip r:embed="rId3"/>
           <a:stretch>
             <a:fillRect/>
           </a:stretch>
@@ -14991,6 +15396,7 @@
         <a:solidFill>
           <a:srgbClr val="FFFFFF"/>
         </a:solidFill>
+        <a:effectLst/>
       </p:bgPr>
     </p:bg>
     <p:spTree>
@@ -15028,7 +15434,7 @@
           <a:bodyPr wrap="square" lIns="0" tIns="0" rIns="0" bIns="0" rtlCol="0" anchor="ctr"/>
           <a:lstStyle/>
           <a:p>
-            <a:pPr indent="0" marL="0">
+            <a:pPr marL="0" indent="0">
               <a:buNone/>
             </a:pPr>
             <a:r>
@@ -15070,17 +15476,24 @@
             <a:prstDash val="solid"/>
           </a:ln>
         </p:spPr>
+        <p:txBody>
+          <a:bodyPr/>
+          <a:lstStyle/>
+          <a:p>
+            <a:endParaRPr lang="en-US"/>
+          </a:p>
+        </p:txBody>
       </p:sp>
       <p:pic>
         <p:nvPicPr>
-          <p:cNvPr id="4" name="Image 0" descr="/sessions/vibrant-quirky-carson/mnt/Crypto-vs-Traditional-Markets/fig2_cumulative_growth.png">    </p:cNvPr>
+          <p:cNvPr id="4" name="Image 0" descr="/sessions/vibrant-quirky-carson/mnt/Crypto-vs-Traditional-Markets/fig2_cumulative_growth.png"/>
           <p:cNvPicPr>
             <a:picLocks noChangeAspect="1"/>
           </p:cNvPicPr>
           <p:nvPr/>
         </p:nvPicPr>
         <p:blipFill>
-          <a:blip r:embed="rId1"/>
+          <a:blip r:embed="rId3"/>
           <a:stretch>
             <a:fillRect/>
           </a:stretch>
@@ -15119,13 +15532,20 @@
             <a:prstDash val="solid"/>
           </a:ln>
           <a:effectLst>
-            <a:outerShdw sx="100000" sy="100000" kx="0" ky="0" algn="bl" rotWithShape="0" blurRad="101600" dist="38100" dir="8100000">
+            <a:outerShdw blurRad="101600" dist="38100" dir="8100000" algn="bl" rotWithShape="0">
               <a:srgbClr val="000000">
                 <a:alpha val="10000"/>
               </a:srgbClr>
             </a:outerShdw>
           </a:effectLst>
         </p:spPr>
+        <p:txBody>
+          <a:bodyPr/>
+          <a:lstStyle/>
+          <a:p>
+            <a:endParaRPr lang="en-US"/>
+          </a:p>
+        </p:txBody>
       </p:sp>
       <p:sp>
         <p:nvSpPr>
@@ -15148,7 +15568,7 @@
           <a:bodyPr wrap="square" lIns="0" tIns="0" rIns="0" bIns="0" rtlCol="0" anchor="ctr"/>
           <a:lstStyle/>
           <a:p>
-            <a:pPr algn="ctr" indent="0" marL="0">
+            <a:pPr marL="0" indent="0" algn="ctr">
               <a:buNone/>
             </a:pPr>
             <a:r>
@@ -15187,7 +15607,7 @@
           <a:bodyPr wrap="square" lIns="0" tIns="0" rIns="0" bIns="0" rtlCol="0" anchor="ctr"/>
           <a:lstStyle/>
           <a:p>
-            <a:pPr algn="ctr" indent="0" marL="0">
+            <a:pPr marL="0" indent="0" algn="ctr">
               <a:buNone/>
             </a:pPr>
             <a:r>
@@ -15226,7 +15646,7 @@
           <a:bodyPr wrap="square" lIns="0" tIns="0" rIns="0" bIns="0" rtlCol="0" anchor="ctr"/>
           <a:lstStyle/>
           <a:p>
-            <a:pPr algn="ctr" indent="0" marL="0">
+            <a:pPr marL="0" indent="0" algn="ctr">
               <a:buNone/>
             </a:pPr>
             <a:r>
@@ -15268,13 +15688,20 @@
             <a:prstDash val="solid"/>
           </a:ln>
           <a:effectLst>
-            <a:outerShdw sx="100000" sy="100000" kx="0" ky="0" algn="bl" rotWithShape="0" blurRad="101600" dist="38100" dir="8100000">
+            <a:outerShdw blurRad="101600" dist="38100" dir="8100000" algn="bl" rotWithShape="0">
               <a:srgbClr val="000000">
                 <a:alpha val="10000"/>
               </a:srgbClr>
             </a:outerShdw>
           </a:effectLst>
         </p:spPr>
+        <p:txBody>
+          <a:bodyPr/>
+          <a:lstStyle/>
+          <a:p>
+            <a:endParaRPr lang="en-US"/>
+          </a:p>
+        </p:txBody>
       </p:sp>
       <p:sp>
         <p:nvSpPr>
@@ -15297,7 +15724,7 @@
           <a:bodyPr wrap="square" lIns="0" tIns="0" rIns="0" bIns="0" rtlCol="0" anchor="ctr"/>
           <a:lstStyle/>
           <a:p>
-            <a:pPr algn="ctr" indent="0" marL="0">
+            <a:pPr marL="0" indent="0" algn="ctr">
               <a:buNone/>
             </a:pPr>
             <a:r>
@@ -15336,7 +15763,7 @@
           <a:bodyPr wrap="square" lIns="0" tIns="0" rIns="0" bIns="0" rtlCol="0" anchor="ctr"/>
           <a:lstStyle/>
           <a:p>
-            <a:pPr algn="ctr" indent="0" marL="0">
+            <a:pPr marL="0" indent="0" algn="ctr">
               <a:buNone/>
             </a:pPr>
             <a:r>
@@ -15375,7 +15802,7 @@
           <a:bodyPr wrap="square" lIns="0" tIns="0" rIns="0" bIns="0" rtlCol="0" anchor="ctr"/>
           <a:lstStyle/>
           <a:p>
-            <a:pPr algn="ctr" indent="0" marL="0">
+            <a:pPr marL="0" indent="0" algn="ctr">
               <a:buNone/>
             </a:pPr>
             <a:r>
@@ -15414,7 +15841,7 @@
           <a:bodyPr wrap="square" lIns="0" tIns="0" rIns="0" bIns="0" rtlCol="0" anchor="ctr"/>
           <a:lstStyle/>
           <a:p>
-            <a:pPr indent="0" marL="0">
+            <a:pPr marL="0" indent="0">
               <a:buNone/>
             </a:pPr>
             <a:r>
@@ -15448,6 +15875,7 @@
         <a:solidFill>
           <a:srgbClr val="1C2B4A"/>
         </a:solidFill>
+        <a:effectLst/>
       </p:bgPr>
     </p:bg>
     <p:spTree>
@@ -15485,7 +15913,7 @@
           <a:bodyPr wrap="square" lIns="0" tIns="0" rIns="0" bIns="0" rtlCol="0" anchor="ctr"/>
           <a:lstStyle/>
           <a:p>
-            <a:pPr indent="0" marL="0">
+            <a:pPr marL="0" indent="0">
               <a:buNone/>
             </a:pPr>
             <a:r>
@@ -15524,7 +15952,7 @@
           <a:bodyPr wrap="square" lIns="0" tIns="0" rIns="0" bIns="0" rtlCol="0" anchor="ctr"/>
           <a:lstStyle/>
           <a:p>
-            <a:pPr indent="0" marL="0">
+            <a:pPr marL="0" indent="0">
               <a:buNone/>
             </a:pPr>
             <a:r>
@@ -15566,6 +15994,13 @@
             <a:prstDash val="solid"/>
           </a:ln>
         </p:spPr>
+        <p:txBody>
+          <a:bodyPr/>
+          <a:lstStyle/>
+          <a:p>
+            <a:endParaRPr lang="en-US"/>
+          </a:p>
+        </p:txBody>
       </p:sp>
       <p:sp>
         <p:nvSpPr>
@@ -15591,13 +16026,20 @@
             <a:prstDash val="solid"/>
           </a:ln>
           <a:effectLst>
-            <a:outerShdw sx="100000" sy="100000" kx="0" ky="0" algn="bl" rotWithShape="0" blurRad="101600" dist="38100" dir="8100000">
+            <a:outerShdw blurRad="101600" dist="38100" dir="8100000" algn="bl" rotWithShape="0">
               <a:srgbClr val="000000">
                 <a:alpha val="10000"/>
               </a:srgbClr>
             </a:outerShdw>
           </a:effectLst>
         </p:spPr>
+        <p:txBody>
+          <a:bodyPr/>
+          <a:lstStyle/>
+          <a:p>
+            <a:endParaRPr lang="en-US"/>
+          </a:p>
+        </p:txBody>
       </p:sp>
       <p:sp>
         <p:nvSpPr>
@@ -15620,7 +16062,7 @@
           <a:bodyPr wrap="square" lIns="0" tIns="0" rIns="0" bIns="0" rtlCol="0" anchor="ctr"/>
           <a:lstStyle/>
           <a:p>
-            <a:pPr algn="ctr" indent="0" marL="0">
+            <a:pPr marL="0" indent="0" algn="ctr">
               <a:buNone/>
             </a:pPr>
             <a:r>
@@ -15659,7 +16101,7 @@
           <a:bodyPr wrap="square" lIns="0" tIns="0" rIns="0" bIns="0" rtlCol="0" anchor="ctr"/>
           <a:lstStyle/>
           <a:p>
-            <a:pPr algn="ctr" indent="0" marL="0">
+            <a:pPr marL="0" indent="0" algn="ctr">
               <a:buNone/>
             </a:pPr>
             <a:r>
@@ -15698,7 +16140,7 @@
           <a:bodyPr wrap="square" lIns="0" tIns="0" rIns="0" bIns="0" rtlCol="0" anchor="ctr"/>
           <a:lstStyle/>
           <a:p>
-            <a:pPr algn="ctr" indent="0" marL="0">
+            <a:pPr marL="0" indent="0" algn="ctr">
               <a:buNone/>
             </a:pPr>
             <a:r>
@@ -15737,7 +16179,7 @@
           <a:bodyPr wrap="square" lIns="0" tIns="0" rIns="0" bIns="0" rtlCol="0" anchor="ctr"/>
           <a:lstStyle/>
           <a:p>
-            <a:pPr algn="ctr" indent="0" marL="0">
+            <a:pPr marL="0" indent="0" algn="ctr">
               <a:buNone/>
             </a:pPr>
             <a:r>
@@ -15754,7 +16196,7 @@
             <a:endParaRPr lang="en-US" sz="1050" dirty="0"/>
           </a:p>
           <a:p>
-            <a:pPr algn="ctr" indent="0" marL="0">
+            <a:pPr marL="0" indent="0" algn="ctr">
               <a:buNone/>
             </a:pPr>
             <a:r>
@@ -15771,7 +16213,7 @@
             <a:endParaRPr lang="en-US" sz="1050" dirty="0"/>
           </a:p>
           <a:p>
-            <a:pPr algn="ctr" indent="0" marL="0">
+            <a:pPr marL="0" indent="0" algn="ctr">
               <a:buNone/>
             </a:pPr>
             <a:r>
@@ -15813,6 +16255,13 @@
             <a:prstDash val="solid"/>
           </a:ln>
         </p:spPr>
+        <p:txBody>
+          <a:bodyPr/>
+          <a:lstStyle/>
+          <a:p>
+            <a:endParaRPr lang="en-US"/>
+          </a:p>
+        </p:txBody>
       </p:sp>
       <p:sp>
         <p:nvSpPr>
@@ -15835,7 +16284,7 @@
           <a:bodyPr wrap="square" lIns="0" tIns="0" rIns="0" bIns="0" rtlCol="0" anchor="ctr"/>
           <a:lstStyle/>
           <a:p>
-            <a:pPr algn="ctr" indent="0" marL="0">
+            <a:pPr marL="0" indent="0" algn="ctr">
               <a:buNone/>
             </a:pPr>
             <a:r>
@@ -15855,14 +16304,14 @@
       </p:sp>
       <p:pic>
         <p:nvPicPr>
-          <p:cNvPr id="12" name="Image 0" descr="/sessions/vibrant-quirky-carson/mnt/Crypto-vs-Traditional-Markets/fig3_correlation_heatmap.png">    </p:cNvPr>
+          <p:cNvPr id="12" name="Image 0" descr="/sessions/vibrant-quirky-carson/mnt/Crypto-vs-Traditional-Markets/fig3_correlation_heatmap.png"/>
           <p:cNvPicPr>
             <a:picLocks noChangeAspect="1"/>
           </p:cNvPicPr>
           <p:nvPr/>
         </p:nvPicPr>
         <p:blipFill>
-          <a:blip r:embed="rId1"/>
+          <a:blip r:embed="rId3"/>
           <a:stretch>
             <a:fillRect/>
           </a:stretch>
@@ -15901,13 +16350,20 @@
             <a:prstDash val="solid"/>
           </a:ln>
           <a:effectLst>
-            <a:outerShdw sx="100000" sy="100000" kx="0" ky="0" algn="bl" rotWithShape="0" blurRad="101600" dist="38100" dir="8100000">
+            <a:outerShdw blurRad="101600" dist="38100" dir="8100000" algn="bl" rotWithShape="0">
               <a:srgbClr val="000000">
                 <a:alpha val="10000"/>
               </a:srgbClr>
             </a:outerShdw>
           </a:effectLst>
         </p:spPr>
+        <p:txBody>
+          <a:bodyPr/>
+          <a:lstStyle/>
+          <a:p>
+            <a:endParaRPr lang="en-US"/>
+          </a:p>
+        </p:txBody>
       </p:sp>
       <p:sp>
         <p:nvSpPr>
@@ -15930,7 +16386,7 @@
           <a:bodyPr wrap="square" lIns="0" tIns="0" rIns="0" bIns="0" rtlCol="0" anchor="ctr"/>
           <a:lstStyle/>
           <a:p>
-            <a:pPr algn="ctr" indent="0" marL="0">
+            <a:pPr marL="0" indent="0" algn="ctr">
               <a:buNone/>
             </a:pPr>
             <a:r>
@@ -15972,6 +16428,13 @@
             <a:prstDash val="solid"/>
           </a:ln>
         </p:spPr>
+        <p:txBody>
+          <a:bodyPr/>
+          <a:lstStyle/>
+          <a:p>
+            <a:endParaRPr lang="en-US"/>
+          </a:p>
+        </p:txBody>
       </p:sp>
       <p:sp>
         <p:nvSpPr>
@@ -15994,7 +16457,7 @@
           <a:bodyPr wrap="square" lIns="0" tIns="0" rIns="0" bIns="0" rtlCol="0" anchor="ctr"/>
           <a:lstStyle/>
           <a:p>
-            <a:pPr indent="0" marL="0">
+            <a:pPr marL="0" indent="0">
               <a:buNone/>
             </a:pPr>
             <a:r>
@@ -16036,6 +16499,13 @@
             <a:prstDash val="solid"/>
           </a:ln>
         </p:spPr>
+        <p:txBody>
+          <a:bodyPr/>
+          <a:lstStyle/>
+          <a:p>
+            <a:endParaRPr lang="en-US"/>
+          </a:p>
+        </p:txBody>
       </p:sp>
       <p:sp>
         <p:nvSpPr>
@@ -16058,7 +16528,7 @@
           <a:bodyPr wrap="square" lIns="0" tIns="0" rIns="0" bIns="0" rtlCol="0" anchor="ctr"/>
           <a:lstStyle/>
           <a:p>
-            <a:pPr indent="0" marL="0">
+            <a:pPr marL="0" indent="0">
               <a:buNone/>
             </a:pPr>
             <a:r>
@@ -16100,6 +16570,13 @@
             <a:prstDash val="solid"/>
           </a:ln>
         </p:spPr>
+        <p:txBody>
+          <a:bodyPr/>
+          <a:lstStyle/>
+          <a:p>
+            <a:endParaRPr lang="en-US"/>
+          </a:p>
+        </p:txBody>
       </p:sp>
       <p:sp>
         <p:nvSpPr>
@@ -16122,7 +16599,7 @@
           <a:bodyPr wrap="square" lIns="0" tIns="0" rIns="0" bIns="0" rtlCol="0" anchor="ctr"/>
           <a:lstStyle/>
           <a:p>
-            <a:pPr indent="0" marL="0">
+            <a:pPr marL="0" indent="0">
               <a:buNone/>
             </a:pPr>
             <a:r>
@@ -16164,6 +16641,13 @@
             <a:prstDash val="solid"/>
           </a:ln>
         </p:spPr>
+        <p:txBody>
+          <a:bodyPr/>
+          <a:lstStyle/>
+          <a:p>
+            <a:endParaRPr lang="en-US"/>
+          </a:p>
+        </p:txBody>
       </p:sp>
       <p:sp>
         <p:nvSpPr>
@@ -16186,7 +16670,7 @@
           <a:bodyPr wrap="square" lIns="0" tIns="0" rIns="0" bIns="0" rtlCol="0" anchor="ctr"/>
           <a:lstStyle/>
           <a:p>
-            <a:pPr indent="0" marL="0">
+            <a:pPr marL="0" indent="0">
               <a:buNone/>
             </a:pPr>
             <a:r>
@@ -16220,6 +16704,7 @@
         <a:solidFill>
           <a:srgbClr val="FFFFFF"/>
         </a:solidFill>
+        <a:effectLst/>
       </p:bgPr>
     </p:bg>
     <p:spTree>
@@ -16257,7 +16742,7 @@
           <a:bodyPr wrap="square" lIns="0" tIns="0" rIns="0" bIns="0" rtlCol="0" anchor="ctr"/>
           <a:lstStyle/>
           <a:p>
-            <a:pPr indent="0" marL="0">
+            <a:pPr marL="0" indent="0">
               <a:buNone/>
             </a:pPr>
             <a:r>
@@ -16299,17 +16784,24 @@
             <a:prstDash val="solid"/>
           </a:ln>
         </p:spPr>
+        <p:txBody>
+          <a:bodyPr/>
+          <a:lstStyle/>
+          <a:p>
+            <a:endParaRPr lang="en-US"/>
+          </a:p>
+        </p:txBody>
       </p:sp>
       <p:pic>
         <p:nvPicPr>
-          <p:cNvPr id="4" name="Image 0" descr="/sessions/vibrant-quirky-carson/mnt/Crypto-vs-Traditional-Markets/fig4_rolling_correlation.png">    </p:cNvPr>
+          <p:cNvPr id="4" name="Image 0" descr="/sessions/vibrant-quirky-carson/mnt/Crypto-vs-Traditional-Markets/fig4_rolling_correlation.png"/>
           <p:cNvPicPr>
             <a:picLocks noChangeAspect="1"/>
           </p:cNvPicPr>
           <p:nvPr/>
         </p:nvPicPr>
         <p:blipFill>
-          <a:blip r:embed="rId1"/>
+          <a:blip r:embed="rId3"/>
           <a:stretch>
             <a:fillRect/>
           </a:stretch>
@@ -16348,13 +16840,20 @@
             <a:prstDash val="solid"/>
           </a:ln>
           <a:effectLst>
-            <a:outerShdw sx="100000" sy="100000" kx="0" ky="0" algn="bl" rotWithShape="0" blurRad="101600" dist="38100" dir="8100000">
+            <a:outerShdw blurRad="101600" dist="38100" dir="8100000" algn="bl" rotWithShape="0">
               <a:srgbClr val="000000">
                 <a:alpha val="10000"/>
               </a:srgbClr>
             </a:outerShdw>
           </a:effectLst>
         </p:spPr>
+        <p:txBody>
+          <a:bodyPr/>
+          <a:lstStyle/>
+          <a:p>
+            <a:endParaRPr lang="en-US"/>
+          </a:p>
+        </p:txBody>
       </p:sp>
       <p:sp>
         <p:nvSpPr>
@@ -16380,6 +16879,13 @@
             <a:prstDash val="solid"/>
           </a:ln>
         </p:spPr>
+        <p:txBody>
+          <a:bodyPr/>
+          <a:lstStyle/>
+          <a:p>
+            <a:endParaRPr lang="en-US"/>
+          </a:p>
+        </p:txBody>
       </p:sp>
       <p:sp>
         <p:nvSpPr>
@@ -16402,7 +16908,7 @@
           <a:bodyPr wrap="square" lIns="0" tIns="0" rIns="0" bIns="0" rtlCol="0" anchor="ctr"/>
           <a:lstStyle/>
           <a:p>
-            <a:pPr indent="0" marL="0">
+            <a:pPr marL="0" indent="0">
               <a:buNone/>
             </a:pPr>
             <a:r>
@@ -16441,7 +16947,7 @@
           <a:bodyPr wrap="square" lIns="0" tIns="0" rIns="0" bIns="0" rtlCol="0" anchor="ctr"/>
           <a:lstStyle/>
           <a:p>
-            <a:pPr indent="0" marL="0">
+            <a:pPr marL="0" indent="0">
               <a:buNone/>
             </a:pPr>
             <a:r>
@@ -16483,13 +16989,20 @@
             <a:prstDash val="solid"/>
           </a:ln>
           <a:effectLst>
-            <a:outerShdw sx="100000" sy="100000" kx="0" ky="0" algn="bl" rotWithShape="0" blurRad="101600" dist="38100" dir="8100000">
+            <a:outerShdw blurRad="101600" dist="38100" dir="8100000" algn="bl" rotWithShape="0">
               <a:srgbClr val="000000">
                 <a:alpha val="10000"/>
               </a:srgbClr>
             </a:outerShdw>
           </a:effectLst>
         </p:spPr>
+        <p:txBody>
+          <a:bodyPr/>
+          <a:lstStyle/>
+          <a:p>
+            <a:endParaRPr lang="en-US"/>
+          </a:p>
+        </p:txBody>
       </p:sp>
       <p:sp>
         <p:nvSpPr>
@@ -16515,6 +17028,13 @@
             <a:prstDash val="solid"/>
           </a:ln>
         </p:spPr>
+        <p:txBody>
+          <a:bodyPr/>
+          <a:lstStyle/>
+          <a:p>
+            <a:endParaRPr lang="en-US"/>
+          </a:p>
+        </p:txBody>
       </p:sp>
       <p:sp>
         <p:nvSpPr>
@@ -16537,7 +17057,7 @@
           <a:bodyPr wrap="square" lIns="0" tIns="0" rIns="0" bIns="0" rtlCol="0" anchor="ctr"/>
           <a:lstStyle/>
           <a:p>
-            <a:pPr indent="0" marL="0">
+            <a:pPr marL="0" indent="0">
               <a:buNone/>
             </a:pPr>
             <a:r>
@@ -16576,7 +17096,7 @@
           <a:bodyPr wrap="square" lIns="0" tIns="0" rIns="0" bIns="0" rtlCol="0" anchor="ctr"/>
           <a:lstStyle/>
           <a:p>
-            <a:pPr indent="0" marL="0">
+            <a:pPr marL="0" indent="0">
               <a:buNone/>
             </a:pPr>
             <a:r>
@@ -16618,13 +17138,20 @@
             <a:prstDash val="solid"/>
           </a:ln>
           <a:effectLst>
-            <a:outerShdw sx="100000" sy="100000" kx="0" ky="0" algn="bl" rotWithShape="0" blurRad="101600" dist="38100" dir="8100000">
+            <a:outerShdw blurRad="101600" dist="38100" dir="8100000" algn="bl" rotWithShape="0">
               <a:srgbClr val="000000">
                 <a:alpha val="10000"/>
               </a:srgbClr>
             </a:outerShdw>
           </a:effectLst>
         </p:spPr>
+        <p:txBody>
+          <a:bodyPr/>
+          <a:lstStyle/>
+          <a:p>
+            <a:endParaRPr lang="en-US"/>
+          </a:p>
+        </p:txBody>
       </p:sp>
       <p:sp>
         <p:nvSpPr>
@@ -16650,6 +17177,13 @@
             <a:prstDash val="solid"/>
           </a:ln>
         </p:spPr>
+        <p:txBody>
+          <a:bodyPr/>
+          <a:lstStyle/>
+          <a:p>
+            <a:endParaRPr lang="en-US"/>
+          </a:p>
+        </p:txBody>
       </p:sp>
       <p:sp>
         <p:nvSpPr>
@@ -16672,7 +17206,7 @@
           <a:bodyPr wrap="square" lIns="0" tIns="0" rIns="0" bIns="0" rtlCol="0" anchor="ctr"/>
           <a:lstStyle/>
           <a:p>
-            <a:pPr indent="0" marL="0">
+            <a:pPr marL="0" indent="0">
               <a:buNone/>
             </a:pPr>
             <a:r>
@@ -16711,7 +17245,7 @@
           <a:bodyPr wrap="square" lIns="0" tIns="0" rIns="0" bIns="0" rtlCol="0" anchor="ctr"/>
           <a:lstStyle/>
           <a:p>
-            <a:pPr indent="0" marL="0">
+            <a:pPr marL="0" indent="0">
               <a:buNone/>
             </a:pPr>
             <a:r>
@@ -16731,22 +17265,22 @@
       </p:sp>
       <p:pic>
         <p:nvPicPr>
-          <p:cNvPr id="17" name="Image 1" descr="/sessions/vibrant-quirky-carson/mnt/Crypto-vs-Traditional-Markets/fig6_yearly_correlation.png">    </p:cNvPr>
+          <p:cNvPr id="17" name="Image 1" descr="/sessions/vibrant-quirky-carson/mnt/Crypto-vs-Traditional-Markets/fig6_yearly_correlation.png"/>
           <p:cNvPicPr>
             <a:picLocks noChangeAspect="1"/>
           </p:cNvPicPr>
           <p:nvPr/>
         </p:nvPicPr>
         <p:blipFill>
-          <a:blip r:embed="rId2"/>
+          <a:blip r:embed="rId4"/>
           <a:stretch>
             <a:fillRect/>
           </a:stretch>
         </p:blipFill>
         <p:spPr>
           <a:xfrm>
-            <a:off x="274320" y="4133088"/>
-            <a:ext cx="8595360" cy="868680"/>
+            <a:off x="155448" y="3970196"/>
+            <a:ext cx="8595360" cy="1129284"/>
           </a:xfrm>
           <a:prstGeom prst="rect">
             <a:avLst/>
@@ -17054,4 +17588,319 @@
     </a:ext>
   </a:extLst>
 </a:theme>
+</file>
+
+<file path=ppt/theme/theme2.xml><?xml version="1.0" encoding="utf-8"?>
+<a:theme xmlns:a="http://schemas.openxmlformats.org/drawingml/2006/main" name="Office Theme">
+  <a:themeElements>
+    <a:clrScheme name="Office">
+      <a:dk1>
+        <a:sysClr val="windowText" lastClr="000000"/>
+      </a:dk1>
+      <a:lt1>
+        <a:sysClr val="window" lastClr="FFFFFF"/>
+      </a:lt1>
+      <a:dk2>
+        <a:srgbClr val="0E2841"/>
+      </a:dk2>
+      <a:lt2>
+        <a:srgbClr val="E8E8E8"/>
+      </a:lt2>
+      <a:accent1>
+        <a:srgbClr val="156082"/>
+      </a:accent1>
+      <a:accent2>
+        <a:srgbClr val="E97132"/>
+      </a:accent2>
+      <a:accent3>
+        <a:srgbClr val="196B24"/>
+      </a:accent3>
+      <a:accent4>
+        <a:srgbClr val="0F9ED5"/>
+      </a:accent4>
+      <a:accent5>
+        <a:srgbClr val="A02B93"/>
+      </a:accent5>
+      <a:accent6>
+        <a:srgbClr val="4EA72E"/>
+      </a:accent6>
+      <a:hlink>
+        <a:srgbClr val="467886"/>
+      </a:hlink>
+      <a:folHlink>
+        <a:srgbClr val="96607D"/>
+      </a:folHlink>
+    </a:clrScheme>
+    <a:fontScheme name="Office">
+      <a:majorFont>
+        <a:latin typeface="Aptos Display" panose="02110004020202020204"/>
+        <a:ea typeface=""/>
+        <a:cs typeface=""/>
+        <a:font script="Jpan" typeface="游ゴシック Light"/>
+        <a:font script="Hang" typeface="맑은 고딕"/>
+        <a:font script="Hans" typeface="等线 Light"/>
+        <a:font script="Hant" typeface="新細明體"/>
+        <a:font script="Arab" typeface="Times New Roman"/>
+        <a:font script="Hebr" typeface="Times New Roman"/>
+        <a:font script="Thai" typeface="Angsana New"/>
+        <a:font script="Ethi" typeface="Nyala"/>
+        <a:font script="Beng" typeface="Vrinda"/>
+        <a:font script="Gujr" typeface="Shruti"/>
+        <a:font script="Khmr" typeface="MoolBoran"/>
+        <a:font script="Knda" typeface="Tunga"/>
+        <a:font script="Guru" typeface="Raavi"/>
+        <a:font script="Cans" typeface="Euphemia"/>
+        <a:font script="Cher" typeface="Plantagenet Cherokee"/>
+        <a:font script="Yiii" typeface="Microsoft Yi Baiti"/>
+        <a:font script="Tibt" typeface="Microsoft Himalaya"/>
+        <a:font script="Thaa" typeface="MV Boli"/>
+        <a:font script="Deva" typeface="Mangal"/>
+        <a:font script="Telu" typeface="Gautami"/>
+        <a:font script="Taml" typeface="Latha"/>
+        <a:font script="Syrc" typeface="Estrangelo Edessa"/>
+        <a:font script="Orya" typeface="Kalinga"/>
+        <a:font script="Mlym" typeface="Kartika"/>
+        <a:font script="Laoo" typeface="DokChampa"/>
+        <a:font script="Sinh" typeface="Iskoola Pota"/>
+        <a:font script="Mong" typeface="Mongolian Baiti"/>
+        <a:font script="Viet" typeface="Times New Roman"/>
+        <a:font script="Uigh" typeface="Microsoft Uighur"/>
+        <a:font script="Geor" typeface="Sylfaen"/>
+        <a:font script="Armn" typeface="Arial"/>
+        <a:font script="Bugi" typeface="Leelawadee UI"/>
+        <a:font script="Bopo" typeface="Microsoft JhengHei"/>
+        <a:font script="Java" typeface="Javanese Text"/>
+        <a:font script="Lisu" typeface="Segoe UI"/>
+        <a:font script="Mymr" typeface="Myanmar Text"/>
+        <a:font script="Nkoo" typeface="Ebrima"/>
+        <a:font script="Olck" typeface="Nirmala UI"/>
+        <a:font script="Osma" typeface="Ebrima"/>
+        <a:font script="Phag" typeface="Phagspa"/>
+        <a:font script="Syrn" typeface="Estrangelo Edessa"/>
+        <a:font script="Syrj" typeface="Estrangelo Edessa"/>
+        <a:font script="Syre" typeface="Estrangelo Edessa"/>
+        <a:font script="Sora" typeface="Nirmala UI"/>
+        <a:font script="Tale" typeface="Microsoft Tai Le"/>
+        <a:font script="Talu" typeface="Microsoft New Tai Lue"/>
+        <a:font script="Tfng" typeface="Ebrima"/>
+      </a:majorFont>
+      <a:minorFont>
+        <a:latin typeface="Aptos" panose="02110004020202020204"/>
+        <a:ea typeface=""/>
+        <a:cs typeface=""/>
+        <a:font script="Jpan" typeface="游ゴシック"/>
+        <a:font script="Hang" typeface="맑은 고딕"/>
+        <a:font script="Hans" typeface="等线"/>
+        <a:font script="Hant" typeface="新細明體"/>
+        <a:font script="Arab" typeface="Arial"/>
+        <a:font script="Hebr" typeface="Arial"/>
+        <a:font script="Thai" typeface="Cordia New"/>
+        <a:font script="Ethi" typeface="Nyala"/>
+        <a:font script="Beng" typeface="Vrinda"/>
+        <a:font script="Gujr" typeface="Shruti"/>
+        <a:font script="Khmr" typeface="DaunPenh"/>
+        <a:font script="Knda" typeface="Tunga"/>
+        <a:font script="Guru" typeface="Raavi"/>
+        <a:font script="Cans" typeface="Euphemia"/>
+        <a:font script="Cher" typeface="Plantagenet Cherokee"/>
+        <a:font script="Yiii" typeface="Microsoft Yi Baiti"/>
+        <a:font script="Tibt" typeface="Microsoft Himalaya"/>
+        <a:font script="Thaa" typeface="MV Boli"/>
+        <a:font script="Deva" typeface="Mangal"/>
+        <a:font script="Telu" typeface="Gautami"/>
+        <a:font script="Taml" typeface="Latha"/>
+        <a:font script="Syrc" typeface="Estrangelo Edessa"/>
+        <a:font script="Orya" typeface="Kalinga"/>
+        <a:font script="Mlym" typeface="Kartika"/>
+        <a:font script="Laoo" typeface="DokChampa"/>
+        <a:font script="Sinh" typeface="Iskoola Pota"/>
+        <a:font script="Mong" typeface="Mongolian Baiti"/>
+        <a:font script="Viet" typeface="Arial"/>
+        <a:font script="Uigh" typeface="Microsoft Uighur"/>
+        <a:font script="Geor" typeface="Sylfaen"/>
+        <a:font script="Armn" typeface="Arial"/>
+        <a:font script="Bugi" typeface="Leelawadee UI"/>
+        <a:font script="Bopo" typeface="Microsoft JhengHei"/>
+        <a:font script="Java" typeface="Javanese Text"/>
+        <a:font script="Lisu" typeface="Segoe UI"/>
+        <a:font script="Mymr" typeface="Myanmar Text"/>
+        <a:font script="Nkoo" typeface="Ebrima"/>
+        <a:font script="Olck" typeface="Nirmala UI"/>
+        <a:font script="Osma" typeface="Ebrima"/>
+        <a:font script="Phag" typeface="Phagspa"/>
+        <a:font script="Syrn" typeface="Estrangelo Edessa"/>
+        <a:font script="Syrj" typeface="Estrangelo Edessa"/>
+        <a:font script="Syre" typeface="Estrangelo Edessa"/>
+        <a:font script="Sora" typeface="Nirmala UI"/>
+        <a:font script="Tale" typeface="Microsoft Tai Le"/>
+        <a:font script="Talu" typeface="Microsoft New Tai Lue"/>
+        <a:font script="Tfng" typeface="Ebrima"/>
+      </a:minorFont>
+    </a:fontScheme>
+    <a:fmtScheme name="Office">
+      <a:fillStyleLst>
+        <a:solidFill>
+          <a:schemeClr val="phClr"/>
+        </a:solidFill>
+        <a:gradFill rotWithShape="1">
+          <a:gsLst>
+            <a:gs pos="0">
+              <a:schemeClr val="phClr">
+                <a:lumMod val="110000"/>
+                <a:satMod val="105000"/>
+                <a:tint val="67000"/>
+              </a:schemeClr>
+            </a:gs>
+            <a:gs pos="50000">
+              <a:schemeClr val="phClr">
+                <a:lumMod val="105000"/>
+                <a:satMod val="103000"/>
+                <a:tint val="73000"/>
+              </a:schemeClr>
+            </a:gs>
+            <a:gs pos="100000">
+              <a:schemeClr val="phClr">
+                <a:lumMod val="105000"/>
+                <a:satMod val="109000"/>
+                <a:tint val="81000"/>
+              </a:schemeClr>
+            </a:gs>
+          </a:gsLst>
+          <a:lin ang="5400000" scaled="0"/>
+        </a:gradFill>
+        <a:gradFill rotWithShape="1">
+          <a:gsLst>
+            <a:gs pos="0">
+              <a:schemeClr val="phClr">
+                <a:satMod val="103000"/>
+                <a:lumMod val="102000"/>
+                <a:tint val="94000"/>
+              </a:schemeClr>
+            </a:gs>
+            <a:gs pos="50000">
+              <a:schemeClr val="phClr">
+                <a:satMod val="110000"/>
+                <a:lumMod val="100000"/>
+                <a:shade val="100000"/>
+              </a:schemeClr>
+            </a:gs>
+            <a:gs pos="100000">
+              <a:schemeClr val="phClr">
+                <a:lumMod val="99000"/>
+                <a:satMod val="120000"/>
+                <a:shade val="78000"/>
+              </a:schemeClr>
+            </a:gs>
+          </a:gsLst>
+          <a:lin ang="5400000" scaled="0"/>
+        </a:gradFill>
+      </a:fillStyleLst>
+      <a:lnStyleLst>
+        <a:ln w="12700" cap="flat" cmpd="sng" algn="ctr">
+          <a:solidFill>
+            <a:schemeClr val="phClr"/>
+          </a:solidFill>
+          <a:prstDash val="solid"/>
+          <a:miter lim="800000"/>
+        </a:ln>
+        <a:ln w="19050" cap="flat" cmpd="sng" algn="ctr">
+          <a:solidFill>
+            <a:schemeClr val="phClr"/>
+          </a:solidFill>
+          <a:prstDash val="solid"/>
+          <a:miter lim="800000"/>
+        </a:ln>
+        <a:ln w="25400" cap="flat" cmpd="sng" algn="ctr">
+          <a:solidFill>
+            <a:schemeClr val="phClr"/>
+          </a:solidFill>
+          <a:prstDash val="solid"/>
+          <a:miter lim="800000"/>
+        </a:ln>
+      </a:lnStyleLst>
+      <a:effectStyleLst>
+        <a:effectStyle>
+          <a:effectLst/>
+        </a:effectStyle>
+        <a:effectStyle>
+          <a:effectLst/>
+        </a:effectStyle>
+        <a:effectStyle>
+          <a:effectLst>
+            <a:outerShdw blurRad="57150" dist="19050" dir="5400000" algn="ctr" rotWithShape="0">
+              <a:srgbClr val="000000">
+                <a:alpha val="63000"/>
+              </a:srgbClr>
+            </a:outerShdw>
+          </a:effectLst>
+        </a:effectStyle>
+      </a:effectStyleLst>
+      <a:bgFillStyleLst>
+        <a:solidFill>
+          <a:schemeClr val="phClr"/>
+        </a:solidFill>
+        <a:solidFill>
+          <a:schemeClr val="phClr">
+            <a:tint val="95000"/>
+            <a:satMod val="170000"/>
+          </a:schemeClr>
+        </a:solidFill>
+        <a:gradFill rotWithShape="1">
+          <a:gsLst>
+            <a:gs pos="0">
+              <a:schemeClr val="phClr">
+                <a:tint val="93000"/>
+                <a:satMod val="150000"/>
+                <a:shade val="98000"/>
+                <a:lumMod val="102000"/>
+              </a:schemeClr>
+            </a:gs>
+            <a:gs pos="50000">
+              <a:schemeClr val="phClr">
+                <a:tint val="98000"/>
+                <a:satMod val="130000"/>
+                <a:shade val="90000"/>
+                <a:lumMod val="103000"/>
+              </a:schemeClr>
+            </a:gs>
+            <a:gs pos="100000">
+              <a:schemeClr val="phClr">
+                <a:shade val="63000"/>
+                <a:satMod val="120000"/>
+              </a:schemeClr>
+            </a:gs>
+          </a:gsLst>
+          <a:lin ang="5400000" scaled="0"/>
+        </a:gradFill>
+      </a:bgFillStyleLst>
+    </a:fmtScheme>
+  </a:themeElements>
+  <a:objectDefaults>
+    <a:lnDef>
+      <a:spPr/>
+      <a:bodyPr/>
+      <a:lstStyle/>
+      <a:style>
+        <a:lnRef idx="2">
+          <a:schemeClr val="accent1"/>
+        </a:lnRef>
+        <a:fillRef idx="0">
+          <a:schemeClr val="accent1"/>
+        </a:fillRef>
+        <a:effectRef idx="1">
+          <a:schemeClr val="accent1"/>
+        </a:effectRef>
+        <a:fontRef idx="minor">
+          <a:schemeClr val="tx1"/>
+        </a:fontRef>
+      </a:style>
+    </a:lnDef>
+  </a:objectDefaults>
+  <a:extraClrSchemeLst/>
+  <a:extLst>
+    <a:ext uri="{05A4C25C-085E-4340-85A3-A5531E510DB2}">
+      <thm15:themeFamily xmlns:thm15="http://schemas.microsoft.com/office/thememl/2012/main" name="Office Theme" id="{2E142A2C-CD16-42D6-873A-C26D2A0506FA}" vid="{1BDDFF52-6CD6-40A5-AB3C-68EB2F1E4D0A}"/>
+    </a:ext>
+  </a:extLst>
+</a:theme>
 </file>